--- a/General Resources/Posters/GHP-poster-template.pptx
+++ b/General Resources/Posters/GHP-poster-template.pptx
@@ -2,7 +2,7 @@
 <file path=ppt/presentation.xml><?xml version="1.0" encoding="utf-8"?>
 <p:presentation xmlns:a="http://schemas.openxmlformats.org/drawingml/2006/main" xmlns:r="http://schemas.openxmlformats.org/officeDocument/2006/relationships" xmlns:p="http://schemas.openxmlformats.org/presentationml/2006/main" embedTrueTypeFonts="1">
   <p:sldMasterIdLst>
-    <p:sldMasterId id="2147483660" r:id="rId1"/>
+    <p:sldMasterId id="2147483672" r:id="rId1"/>
   </p:sldMasterIdLst>
   <p:notesMasterIdLst>
     <p:notesMasterId r:id="rId3"/>
@@ -10,7 +10,7 @@
   <p:sldIdLst>
     <p:sldId id="313" r:id="rId2"/>
   </p:sldIdLst>
-  <p:sldSz cx="49377600" cy="32918400"/>
+  <p:sldSz cx="32918400" cy="21945600"/>
   <p:notesSz cx="6858000" cy="9144000"/>
   <p:embeddedFontLst>
     <p:embeddedFont>
@@ -27,12 +27,13 @@
     <p:embeddedFont>
       <p:font typeface="Segoe UI Black" panose="020B0A02040204020203" pitchFamily="34" charset="0"/>
       <p:bold r:id="rId9"/>
-      <p:boldItalic r:id="rId10"/>
+      <p:italic r:id="rId10"/>
+      <p:boldItalic r:id="rId11"/>
     </p:embeddedFont>
     <p:embeddedFont>
       <p:font typeface="Segoe UI Light" panose="020B0502040204020203" pitchFamily="34" charset="0"/>
-      <p:regular r:id="rId11"/>
-      <p:italic r:id="rId12"/>
+      <p:regular r:id="rId12"/>
+      <p:italic r:id="rId13"/>
     </p:embeddedFont>
   </p:embeddedFontLst>
   <p:defaultTextStyle>
@@ -133,67 +134,67 @@
   <p:extLst>
     <p:ext uri="{EFAFB233-063F-42B5-8137-9DF3F51BA10A}">
       <p15:sldGuideLst xmlns:p15="http://schemas.microsoft.com/office/powerpoint/2012/main">
-        <p15:guide id="2" pos="15552" userDrawn="1">
+        <p15:guide id="2" pos="10368" userDrawn="1">
           <p15:clr>
             <a:srgbClr val="A4A3A4"/>
           </p15:clr>
         </p15:guide>
-        <p15:guide id="3" pos="2712" userDrawn="1">
+        <p15:guide id="3" pos="1807" userDrawn="1">
           <p15:clr>
             <a:srgbClr val="A4A3A4"/>
           </p15:clr>
         </p15:guide>
-        <p15:guide id="6" orient="horz" pos="1104" userDrawn="1">
+        <p15:guide id="6" orient="horz" pos="736" userDrawn="1">
           <p15:clr>
             <a:srgbClr val="A4A3A4"/>
           </p15:clr>
         </p15:guide>
-        <p15:guide id="7" pos="5304" userDrawn="1">
+        <p15:guide id="7" pos="3535" userDrawn="1">
           <p15:clr>
             <a:srgbClr val="A4A3A4"/>
           </p15:clr>
         </p15:guide>
-        <p15:guide id="8" pos="10536" userDrawn="1">
+        <p15:guide id="8" pos="7025" userDrawn="1">
           <p15:clr>
             <a:srgbClr val="5ACBF0"/>
           </p15:clr>
         </p15:guide>
-        <p15:guide id="9" pos="7896" userDrawn="1">
+        <p15:guide id="9" pos="5263" userDrawn="1">
           <p15:clr>
             <a:srgbClr val="A4A3A4"/>
           </p15:clr>
         </p15:guide>
-        <p15:guide id="10" pos="13104" userDrawn="1">
+        <p15:guide id="10" pos="8736" userDrawn="1">
           <p15:clr>
             <a:srgbClr val="A4A3A4"/>
           </p15:clr>
         </p15:guide>
-        <p15:guide id="11" pos="18168" userDrawn="1">
+        <p15:guide id="11" pos="12113" userDrawn="1">
           <p15:clr>
             <a:srgbClr val="A4A3A4"/>
           </p15:clr>
         </p15:guide>
-        <p15:guide id="12" pos="20836" userDrawn="1">
+        <p15:guide id="12" pos="13890" userDrawn="1">
           <p15:clr>
             <a:srgbClr val="A4A3A4"/>
           </p15:clr>
         </p15:guide>
-        <p15:guide id="13" pos="23328" userDrawn="1">
+        <p15:guide id="13" pos="15552" userDrawn="1">
           <p15:clr>
             <a:srgbClr val="A4A3A4"/>
           </p15:clr>
         </p15:guide>
-        <p15:guide id="14" pos="25944" userDrawn="1">
+        <p15:guide id="14" pos="17297" userDrawn="1">
           <p15:clr>
             <a:srgbClr val="A4A3A4"/>
           </p15:clr>
         </p15:guide>
-        <p15:guide id="15" pos="28440" userDrawn="1">
+        <p15:guide id="15" pos="18960" userDrawn="1">
           <p15:clr>
             <a:srgbClr val="A4A3A4"/>
           </p15:clr>
         </p15:guide>
-        <p15:guide id="16" orient="horz" pos="20040" userDrawn="1">
+        <p15:guide id="16" orient="horz" pos="13360" userDrawn="1">
           <p15:clr>
             <a:srgbClr val="A4A3A4"/>
           </p15:clr>
@@ -286,7 +287,7 @@
           <a:p>
             <a:fld id="{BD1CB04D-1C75-43E0-9B64-B7DDAA42BB2C}" type="datetimeFigureOut">
               <a:rPr lang="en-US" smtClean="0"/>
-              <a:t>7/1/2025</a:t>
+              <a:t>6/28/26</a:t>
             </a:fld>
             <a:endParaRPr lang="en-US"/>
           </a:p>
@@ -459,8 +460,8 @@
   </p:cSld>
   <p:clrMap bg1="lt1" tx1="dk1" bg2="lt2" tx2="dk2" accent1="accent1" accent2="accent2" accent3="accent3" accent4="accent4" accent5="accent5" accent6="accent6" hlink="hlink" folHlink="folHlink"/>
   <p:notesStyle>
-    <a:lvl1pPr marL="0" algn="l" defTabSz="914400" rtl="0" eaLnBrk="1" latinLnBrk="0" hangingPunct="1">
-      <a:defRPr sz="1200" kern="1200">
+    <a:lvl1pPr marL="0" algn="l" defTabSz="609539" rtl="0" eaLnBrk="1" latinLnBrk="0" hangingPunct="1">
+      <a:defRPr sz="800" kern="1200">
         <a:solidFill>
           <a:schemeClr val="tx1"/>
         </a:solidFill>
@@ -469,8 +470,8 @@
         <a:cs typeface="+mn-cs"/>
       </a:defRPr>
     </a:lvl1pPr>
-    <a:lvl2pPr marL="457200" algn="l" defTabSz="914400" rtl="0" eaLnBrk="1" latinLnBrk="0" hangingPunct="1">
-      <a:defRPr sz="1200" kern="1200">
+    <a:lvl2pPr marL="304770" algn="l" defTabSz="609539" rtl="0" eaLnBrk="1" latinLnBrk="0" hangingPunct="1">
+      <a:defRPr sz="800" kern="1200">
         <a:solidFill>
           <a:schemeClr val="tx1"/>
         </a:solidFill>
@@ -479,8 +480,8 @@
         <a:cs typeface="+mn-cs"/>
       </a:defRPr>
     </a:lvl2pPr>
-    <a:lvl3pPr marL="914400" algn="l" defTabSz="914400" rtl="0" eaLnBrk="1" latinLnBrk="0" hangingPunct="1">
-      <a:defRPr sz="1200" kern="1200">
+    <a:lvl3pPr marL="609539" algn="l" defTabSz="609539" rtl="0" eaLnBrk="1" latinLnBrk="0" hangingPunct="1">
+      <a:defRPr sz="800" kern="1200">
         <a:solidFill>
           <a:schemeClr val="tx1"/>
         </a:solidFill>
@@ -489,8 +490,8 @@
         <a:cs typeface="+mn-cs"/>
       </a:defRPr>
     </a:lvl3pPr>
-    <a:lvl4pPr marL="1371600" algn="l" defTabSz="914400" rtl="0" eaLnBrk="1" latinLnBrk="0" hangingPunct="1">
-      <a:defRPr sz="1200" kern="1200">
+    <a:lvl4pPr marL="914309" algn="l" defTabSz="609539" rtl="0" eaLnBrk="1" latinLnBrk="0" hangingPunct="1">
+      <a:defRPr sz="800" kern="1200">
         <a:solidFill>
           <a:schemeClr val="tx1"/>
         </a:solidFill>
@@ -499,8 +500,8 @@
         <a:cs typeface="+mn-cs"/>
       </a:defRPr>
     </a:lvl4pPr>
-    <a:lvl5pPr marL="1828800" algn="l" defTabSz="914400" rtl="0" eaLnBrk="1" latinLnBrk="0" hangingPunct="1">
-      <a:defRPr sz="1200" kern="1200">
+    <a:lvl5pPr marL="1219078" algn="l" defTabSz="609539" rtl="0" eaLnBrk="1" latinLnBrk="0" hangingPunct="1">
+      <a:defRPr sz="800" kern="1200">
         <a:solidFill>
           <a:schemeClr val="tx1"/>
         </a:solidFill>
@@ -509,8 +510,8 @@
         <a:cs typeface="+mn-cs"/>
       </a:defRPr>
     </a:lvl5pPr>
-    <a:lvl6pPr marL="2286000" algn="l" defTabSz="914400" rtl="0" eaLnBrk="1" latinLnBrk="0" hangingPunct="1">
-      <a:defRPr sz="1200" kern="1200">
+    <a:lvl6pPr marL="1523848" algn="l" defTabSz="609539" rtl="0" eaLnBrk="1" latinLnBrk="0" hangingPunct="1">
+      <a:defRPr sz="800" kern="1200">
         <a:solidFill>
           <a:schemeClr val="tx1"/>
         </a:solidFill>
@@ -519,8 +520,8 @@
         <a:cs typeface="+mn-cs"/>
       </a:defRPr>
     </a:lvl6pPr>
-    <a:lvl7pPr marL="2743200" algn="l" defTabSz="914400" rtl="0" eaLnBrk="1" latinLnBrk="0" hangingPunct="1">
-      <a:defRPr sz="1200" kern="1200">
+    <a:lvl7pPr marL="1828617" algn="l" defTabSz="609539" rtl="0" eaLnBrk="1" latinLnBrk="0" hangingPunct="1">
+      <a:defRPr sz="800" kern="1200">
         <a:solidFill>
           <a:schemeClr val="tx1"/>
         </a:solidFill>
@@ -529,8 +530,8 @@
         <a:cs typeface="+mn-cs"/>
       </a:defRPr>
     </a:lvl7pPr>
-    <a:lvl8pPr marL="3200400" algn="l" defTabSz="914400" rtl="0" eaLnBrk="1" latinLnBrk="0" hangingPunct="1">
-      <a:defRPr sz="1200" kern="1200">
+    <a:lvl8pPr marL="2133387" algn="l" defTabSz="609539" rtl="0" eaLnBrk="1" latinLnBrk="0" hangingPunct="1">
+      <a:defRPr sz="800" kern="1200">
         <a:solidFill>
           <a:schemeClr val="tx1"/>
         </a:solidFill>
@@ -539,8 +540,8 @@
         <a:cs typeface="+mn-cs"/>
       </a:defRPr>
     </a:lvl8pPr>
-    <a:lvl9pPr marL="3657600" algn="l" defTabSz="914400" rtl="0" eaLnBrk="1" latinLnBrk="0" hangingPunct="1">
-      <a:defRPr sz="1200" kern="1200">
+    <a:lvl9pPr marL="2438156" algn="l" defTabSz="609539" rtl="0" eaLnBrk="1" latinLnBrk="0" hangingPunct="1">
+      <a:defRPr sz="800" kern="1200">
         <a:solidFill>
           <a:schemeClr val="tx1"/>
         </a:solidFill>
@@ -582,15 +583,15 @@
         </p:nvSpPr>
         <p:spPr>
           <a:xfrm>
-            <a:off x="3703320" y="5387342"/>
-            <a:ext cx="41970960" cy="11460480"/>
+            <a:off x="2468880" y="3591562"/>
+            <a:ext cx="27980640" cy="7640320"/>
           </a:xfrm>
         </p:spPr>
         <p:txBody>
           <a:bodyPr anchor="b"/>
           <a:lstStyle>
             <a:lvl1pPr algn="ctr">
-              <a:defRPr sz="28800"/>
+              <a:defRPr sz="19200"/>
             </a:lvl1pPr>
           </a:lstStyle>
           <a:p>
@@ -614,8 +615,8 @@
         </p:nvSpPr>
         <p:spPr>
           <a:xfrm>
-            <a:off x="6172200" y="17289782"/>
-            <a:ext cx="37033200" cy="7947658"/>
+            <a:off x="4114800" y="11526522"/>
+            <a:ext cx="24688800" cy="5298438"/>
           </a:xfrm>
         </p:spPr>
         <p:txBody>
@@ -623,39 +624,39 @@
           <a:lstStyle>
             <a:lvl1pPr marL="0" indent="0" algn="ctr">
               <a:buNone/>
-              <a:defRPr sz="11520"/>
+              <a:defRPr sz="7680"/>
             </a:lvl1pPr>
-            <a:lvl2pPr marL="2194560" indent="0" algn="ctr">
-              <a:buNone/>
-              <a:defRPr sz="9600"/>
+            <a:lvl2pPr marL="1463040" indent="0" algn="ctr">
+              <a:buNone/>
+              <a:defRPr sz="6400"/>
             </a:lvl2pPr>
-            <a:lvl3pPr marL="4389120" indent="0" algn="ctr">
-              <a:buNone/>
-              <a:defRPr sz="8640"/>
+            <a:lvl3pPr marL="2926080" indent="0" algn="ctr">
+              <a:buNone/>
+              <a:defRPr sz="5760"/>
             </a:lvl3pPr>
-            <a:lvl4pPr marL="6583680" indent="0" algn="ctr">
-              <a:buNone/>
-              <a:defRPr sz="7680"/>
+            <a:lvl4pPr marL="4389120" indent="0" algn="ctr">
+              <a:buNone/>
+              <a:defRPr sz="5120"/>
             </a:lvl4pPr>
-            <a:lvl5pPr marL="8778240" indent="0" algn="ctr">
-              <a:buNone/>
-              <a:defRPr sz="7680"/>
+            <a:lvl5pPr marL="5852160" indent="0" algn="ctr">
+              <a:buNone/>
+              <a:defRPr sz="5120"/>
             </a:lvl5pPr>
-            <a:lvl6pPr marL="10972800" indent="0" algn="ctr">
-              <a:buNone/>
-              <a:defRPr sz="7680"/>
+            <a:lvl6pPr marL="7315200" indent="0" algn="ctr">
+              <a:buNone/>
+              <a:defRPr sz="5120"/>
             </a:lvl6pPr>
-            <a:lvl7pPr marL="13167360" indent="0" algn="ctr">
-              <a:buNone/>
-              <a:defRPr sz="7680"/>
+            <a:lvl7pPr marL="8778240" indent="0" algn="ctr">
+              <a:buNone/>
+              <a:defRPr sz="5120"/>
             </a:lvl7pPr>
-            <a:lvl8pPr marL="15361920" indent="0" algn="ctr">
-              <a:buNone/>
-              <a:defRPr sz="7680"/>
+            <a:lvl8pPr marL="10241280" indent="0" algn="ctr">
+              <a:buNone/>
+              <a:defRPr sz="5120"/>
             </a:lvl8pPr>
-            <a:lvl9pPr marL="17556480" indent="0" algn="ctr">
-              <a:buNone/>
-              <a:defRPr sz="7680"/>
+            <a:lvl9pPr marL="11704320" indent="0" algn="ctr">
+              <a:buNone/>
+              <a:defRPr sz="5120"/>
             </a:lvl9pPr>
           </a:lstStyle>
           <a:p>
@@ -684,7 +685,7 @@
           <a:p>
             <a:fld id="{3F135061-2F74-46D4-9F8F-C77EF304855D}" type="datetimeFigureOut">
               <a:rPr lang="en-US" smtClean="0"/>
-              <a:t>7/1/2025</a:t>
+              <a:t>6/28/26</a:t>
             </a:fld>
             <a:endParaRPr lang="en-US"/>
           </a:p>
@@ -735,7 +736,7 @@
     </p:spTree>
     <p:extLst>
       <p:ext uri="{BB962C8B-B14F-4D97-AF65-F5344CB8AC3E}">
-        <p14:creationId xmlns:p14="http://schemas.microsoft.com/office/powerpoint/2010/main" val="1601755917"/>
+        <p14:creationId xmlns:p14="http://schemas.microsoft.com/office/powerpoint/2010/main" val="2054211123"/>
       </p:ext>
     </p:extLst>
   </p:cSld>
@@ -803,7 +804,7 @@
             <a:pPr lvl="0"/>
             <a:r>
               <a:rPr lang="en-US"/>
-              <a:t>Edit Master text styles</a:t>
+              <a:t>Click to edit Master text styles</a:t>
             </a:r>
           </a:p>
           <a:p>
@@ -854,7 +855,7 @@
           <a:p>
             <a:fld id="{3F135061-2F74-46D4-9F8F-C77EF304855D}" type="datetimeFigureOut">
               <a:rPr lang="en-US" smtClean="0"/>
-              <a:t>7/1/2025</a:t>
+              <a:t>6/28/26</a:t>
             </a:fld>
             <a:endParaRPr lang="en-US"/>
           </a:p>
@@ -905,7 +906,7 @@
     </p:spTree>
     <p:extLst>
       <p:ext uri="{BB962C8B-B14F-4D97-AF65-F5344CB8AC3E}">
-        <p14:creationId xmlns:p14="http://schemas.microsoft.com/office/powerpoint/2010/main" val="4213694950"/>
+        <p14:creationId xmlns:p14="http://schemas.microsoft.com/office/powerpoint/2010/main" val="4211644913"/>
       </p:ext>
     </p:extLst>
   </p:cSld>
@@ -944,8 +945,8 @@
         </p:nvSpPr>
         <p:spPr>
           <a:xfrm>
-            <a:off x="35335848" y="1752600"/>
-            <a:ext cx="10647045" cy="27896822"/>
+            <a:off x="23557232" y="1168400"/>
+            <a:ext cx="7098030" cy="18597882"/>
           </a:xfrm>
         </p:spPr>
         <p:txBody>
@@ -972,8 +973,8 @@
         </p:nvSpPr>
         <p:spPr>
           <a:xfrm>
-            <a:off x="3394713" y="1752600"/>
-            <a:ext cx="31323915" cy="27896822"/>
+            <a:off x="2263142" y="1168400"/>
+            <a:ext cx="20882610" cy="18597882"/>
           </a:xfrm>
         </p:spPr>
         <p:txBody>
@@ -983,7 +984,7 @@
             <a:pPr lvl="0"/>
             <a:r>
               <a:rPr lang="en-US"/>
-              <a:t>Edit Master text styles</a:t>
+              <a:t>Click to edit Master text styles</a:t>
             </a:r>
           </a:p>
           <a:p>
@@ -1034,7 +1035,7 @@
           <a:p>
             <a:fld id="{3F135061-2F74-46D4-9F8F-C77EF304855D}" type="datetimeFigureOut">
               <a:rPr lang="en-US" smtClean="0"/>
-              <a:t>7/1/2025</a:t>
+              <a:t>6/28/26</a:t>
             </a:fld>
             <a:endParaRPr lang="en-US"/>
           </a:p>
@@ -1085,7 +1086,7 @@
     </p:spTree>
     <p:extLst>
       <p:ext uri="{BB962C8B-B14F-4D97-AF65-F5344CB8AC3E}">
-        <p14:creationId xmlns:p14="http://schemas.microsoft.com/office/powerpoint/2010/main" val="3062549596"/>
+        <p14:creationId xmlns:p14="http://schemas.microsoft.com/office/powerpoint/2010/main" val="3781695563"/>
       </p:ext>
     </p:extLst>
   </p:cSld>
@@ -1153,7 +1154,7 @@
             <a:pPr lvl="0"/>
             <a:r>
               <a:rPr lang="en-US"/>
-              <a:t>Edit Master text styles</a:t>
+              <a:t>Click to edit Master text styles</a:t>
             </a:r>
           </a:p>
           <a:p>
@@ -1204,7 +1205,7 @@
           <a:p>
             <a:fld id="{3F135061-2F74-46D4-9F8F-C77EF304855D}" type="datetimeFigureOut">
               <a:rPr lang="en-US" smtClean="0"/>
-              <a:t>7/1/2025</a:t>
+              <a:t>6/28/26</a:t>
             </a:fld>
             <a:endParaRPr lang="en-US"/>
           </a:p>
@@ -1255,7 +1256,7 @@
     </p:spTree>
     <p:extLst>
       <p:ext uri="{BB962C8B-B14F-4D97-AF65-F5344CB8AC3E}">
-        <p14:creationId xmlns:p14="http://schemas.microsoft.com/office/powerpoint/2010/main" val="1311104895"/>
+        <p14:creationId xmlns:p14="http://schemas.microsoft.com/office/powerpoint/2010/main" val="1377051696"/>
       </p:ext>
     </p:extLst>
   </p:cSld>
@@ -1294,15 +1295,15 @@
         </p:nvSpPr>
         <p:spPr>
           <a:xfrm>
-            <a:off x="3368995" y="8206749"/>
-            <a:ext cx="42588180" cy="13693138"/>
+            <a:off x="2245997" y="5471167"/>
+            <a:ext cx="28392120" cy="9128758"/>
           </a:xfrm>
         </p:spPr>
         <p:txBody>
           <a:bodyPr anchor="b"/>
           <a:lstStyle>
             <a:lvl1pPr>
-              <a:defRPr sz="28800"/>
+              <a:defRPr sz="19200"/>
             </a:lvl1pPr>
           </a:lstStyle>
           <a:p>
@@ -1326,8 +1327,8 @@
         </p:nvSpPr>
         <p:spPr>
           <a:xfrm>
-            <a:off x="3368995" y="22029429"/>
-            <a:ext cx="42588180" cy="7200898"/>
+            <a:off x="2245997" y="14686287"/>
+            <a:ext cx="28392120" cy="4800598"/>
           </a:xfrm>
         </p:spPr>
         <p:txBody>
@@ -1335,15 +1336,15 @@
           <a:lstStyle>
             <a:lvl1pPr marL="0" indent="0">
               <a:buNone/>
-              <a:defRPr sz="11520">
+              <a:defRPr sz="7680">
                 <a:solidFill>
                   <a:schemeClr val="tx1"/>
                 </a:solidFill>
               </a:defRPr>
             </a:lvl1pPr>
-            <a:lvl2pPr marL="2194560" indent="0">
-              <a:buNone/>
-              <a:defRPr sz="9600">
+            <a:lvl2pPr marL="1463040" indent="0">
+              <a:buNone/>
+              <a:defRPr sz="6400">
                 <a:solidFill>
                   <a:schemeClr val="tx1">
                     <a:tint val="75000"/>
@@ -1351,9 +1352,9 @@
                 </a:solidFill>
               </a:defRPr>
             </a:lvl2pPr>
-            <a:lvl3pPr marL="4389120" indent="0">
-              <a:buNone/>
-              <a:defRPr sz="8640">
+            <a:lvl3pPr marL="2926080" indent="0">
+              <a:buNone/>
+              <a:defRPr sz="5760">
                 <a:solidFill>
                   <a:schemeClr val="tx1">
                     <a:tint val="75000"/>
@@ -1361,9 +1362,9 @@
                 </a:solidFill>
               </a:defRPr>
             </a:lvl3pPr>
-            <a:lvl4pPr marL="6583680" indent="0">
-              <a:buNone/>
-              <a:defRPr sz="7680">
+            <a:lvl4pPr marL="4389120" indent="0">
+              <a:buNone/>
+              <a:defRPr sz="5120">
                 <a:solidFill>
                   <a:schemeClr val="tx1">
                     <a:tint val="75000"/>
@@ -1371,9 +1372,9 @@
                 </a:solidFill>
               </a:defRPr>
             </a:lvl4pPr>
-            <a:lvl5pPr marL="8778240" indent="0">
-              <a:buNone/>
-              <a:defRPr sz="7680">
+            <a:lvl5pPr marL="5852160" indent="0">
+              <a:buNone/>
+              <a:defRPr sz="5120">
                 <a:solidFill>
                   <a:schemeClr val="tx1">
                     <a:tint val="75000"/>
@@ -1381,9 +1382,9 @@
                 </a:solidFill>
               </a:defRPr>
             </a:lvl5pPr>
-            <a:lvl6pPr marL="10972800" indent="0">
-              <a:buNone/>
-              <a:defRPr sz="7680">
+            <a:lvl6pPr marL="7315200" indent="0">
+              <a:buNone/>
+              <a:defRPr sz="5120">
                 <a:solidFill>
                   <a:schemeClr val="tx1">
                     <a:tint val="75000"/>
@@ -1391,9 +1392,9 @@
                 </a:solidFill>
               </a:defRPr>
             </a:lvl6pPr>
-            <a:lvl7pPr marL="13167360" indent="0">
-              <a:buNone/>
-              <a:defRPr sz="7680">
+            <a:lvl7pPr marL="8778240" indent="0">
+              <a:buNone/>
+              <a:defRPr sz="5120">
                 <a:solidFill>
                   <a:schemeClr val="tx1">
                     <a:tint val="75000"/>
@@ -1401,9 +1402,9 @@
                 </a:solidFill>
               </a:defRPr>
             </a:lvl7pPr>
-            <a:lvl8pPr marL="15361920" indent="0">
-              <a:buNone/>
-              <a:defRPr sz="7680">
+            <a:lvl8pPr marL="10241280" indent="0">
+              <a:buNone/>
+              <a:defRPr sz="5120">
                 <a:solidFill>
                   <a:schemeClr val="tx1">
                     <a:tint val="75000"/>
@@ -1411,9 +1412,9 @@
                 </a:solidFill>
               </a:defRPr>
             </a:lvl8pPr>
-            <a:lvl9pPr marL="17556480" indent="0">
-              <a:buNone/>
-              <a:defRPr sz="7680">
+            <a:lvl9pPr marL="11704320" indent="0">
+              <a:buNone/>
+              <a:defRPr sz="5120">
                 <a:solidFill>
                   <a:schemeClr val="tx1">
                     <a:tint val="75000"/>
@@ -1426,7 +1427,7 @@
             <a:pPr lvl="0"/>
             <a:r>
               <a:rPr lang="en-US"/>
-              <a:t>Edit Master text styles</a:t>
+              <a:t>Click to edit Master text styles</a:t>
             </a:r>
           </a:p>
         </p:txBody>
@@ -1448,7 +1449,7 @@
           <a:p>
             <a:fld id="{3F135061-2F74-46D4-9F8F-C77EF304855D}" type="datetimeFigureOut">
               <a:rPr lang="en-US" smtClean="0"/>
-              <a:t>7/1/2025</a:t>
+              <a:t>6/28/26</a:t>
             </a:fld>
             <a:endParaRPr lang="en-US"/>
           </a:p>
@@ -1499,7 +1500,7 @@
     </p:spTree>
     <p:extLst>
       <p:ext uri="{BB962C8B-B14F-4D97-AF65-F5344CB8AC3E}">
-        <p14:creationId xmlns:p14="http://schemas.microsoft.com/office/powerpoint/2010/main" val="1055305001"/>
+        <p14:creationId xmlns:p14="http://schemas.microsoft.com/office/powerpoint/2010/main" val="3438307581"/>
       </p:ext>
     </p:extLst>
   </p:cSld>
@@ -1561,8 +1562,8 @@
         </p:nvSpPr>
         <p:spPr>
           <a:xfrm>
-            <a:off x="3394710" y="8763000"/>
-            <a:ext cx="20985480" cy="20886422"/>
+            <a:off x="2263140" y="5842000"/>
+            <a:ext cx="13990320" cy="13924282"/>
           </a:xfrm>
         </p:spPr>
         <p:txBody>
@@ -1572,7 +1573,7 @@
             <a:pPr lvl="0"/>
             <a:r>
               <a:rPr lang="en-US"/>
-              <a:t>Edit Master text styles</a:t>
+              <a:t>Click to edit Master text styles</a:t>
             </a:r>
           </a:p>
           <a:p>
@@ -1618,8 +1619,8 @@
         </p:nvSpPr>
         <p:spPr>
           <a:xfrm>
-            <a:off x="24997410" y="8763000"/>
-            <a:ext cx="20985480" cy="20886422"/>
+            <a:off x="16664940" y="5842000"/>
+            <a:ext cx="13990320" cy="13924282"/>
           </a:xfrm>
         </p:spPr>
         <p:txBody>
@@ -1629,7 +1630,7 @@
             <a:pPr lvl="0"/>
             <a:r>
               <a:rPr lang="en-US"/>
-              <a:t>Edit Master text styles</a:t>
+              <a:t>Click to edit Master text styles</a:t>
             </a:r>
           </a:p>
           <a:p>
@@ -1680,7 +1681,7 @@
           <a:p>
             <a:fld id="{3F135061-2F74-46D4-9F8F-C77EF304855D}" type="datetimeFigureOut">
               <a:rPr lang="en-US" smtClean="0"/>
-              <a:t>7/1/2025</a:t>
+              <a:t>6/28/26</a:t>
             </a:fld>
             <a:endParaRPr lang="en-US"/>
           </a:p>
@@ -1731,7 +1732,7 @@
     </p:spTree>
     <p:extLst>
       <p:ext uri="{BB962C8B-B14F-4D97-AF65-F5344CB8AC3E}">
-        <p14:creationId xmlns:p14="http://schemas.microsoft.com/office/powerpoint/2010/main" val="4282151913"/>
+        <p14:creationId xmlns:p14="http://schemas.microsoft.com/office/powerpoint/2010/main" val="2860351669"/>
       </p:ext>
     </p:extLst>
   </p:cSld>
@@ -1770,8 +1771,8 @@
         </p:nvSpPr>
         <p:spPr>
           <a:xfrm>
-            <a:off x="3401141" y="1752607"/>
-            <a:ext cx="42588180" cy="6362702"/>
+            <a:off x="2267428" y="1168405"/>
+            <a:ext cx="28392120" cy="4241802"/>
           </a:xfrm>
         </p:spPr>
         <p:txBody>
@@ -1798,8 +1799,8 @@
         </p:nvSpPr>
         <p:spPr>
           <a:xfrm>
-            <a:off x="3401147" y="8069582"/>
-            <a:ext cx="20889036" cy="3954778"/>
+            <a:off x="2267431" y="5379722"/>
+            <a:ext cx="13926024" cy="2636518"/>
           </a:xfrm>
         </p:spPr>
         <p:txBody>
@@ -1807,46 +1808,46 @@
           <a:lstStyle>
             <a:lvl1pPr marL="0" indent="0">
               <a:buNone/>
-              <a:defRPr sz="11520" b="1"/>
+              <a:defRPr sz="7680" b="1"/>
             </a:lvl1pPr>
-            <a:lvl2pPr marL="2194560" indent="0">
-              <a:buNone/>
-              <a:defRPr sz="9600" b="1"/>
+            <a:lvl2pPr marL="1463040" indent="0">
+              <a:buNone/>
+              <a:defRPr sz="6400" b="1"/>
             </a:lvl2pPr>
-            <a:lvl3pPr marL="4389120" indent="0">
-              <a:buNone/>
-              <a:defRPr sz="8640" b="1"/>
+            <a:lvl3pPr marL="2926080" indent="0">
+              <a:buNone/>
+              <a:defRPr sz="5760" b="1"/>
             </a:lvl3pPr>
-            <a:lvl4pPr marL="6583680" indent="0">
-              <a:buNone/>
-              <a:defRPr sz="7680" b="1"/>
+            <a:lvl4pPr marL="4389120" indent="0">
+              <a:buNone/>
+              <a:defRPr sz="5120" b="1"/>
             </a:lvl4pPr>
-            <a:lvl5pPr marL="8778240" indent="0">
-              <a:buNone/>
-              <a:defRPr sz="7680" b="1"/>
+            <a:lvl5pPr marL="5852160" indent="0">
+              <a:buNone/>
+              <a:defRPr sz="5120" b="1"/>
             </a:lvl5pPr>
-            <a:lvl6pPr marL="10972800" indent="0">
-              <a:buNone/>
-              <a:defRPr sz="7680" b="1"/>
+            <a:lvl6pPr marL="7315200" indent="0">
+              <a:buNone/>
+              <a:defRPr sz="5120" b="1"/>
             </a:lvl6pPr>
-            <a:lvl7pPr marL="13167360" indent="0">
-              <a:buNone/>
-              <a:defRPr sz="7680" b="1"/>
+            <a:lvl7pPr marL="8778240" indent="0">
+              <a:buNone/>
+              <a:defRPr sz="5120" b="1"/>
             </a:lvl7pPr>
-            <a:lvl8pPr marL="15361920" indent="0">
-              <a:buNone/>
-              <a:defRPr sz="7680" b="1"/>
+            <a:lvl8pPr marL="10241280" indent="0">
+              <a:buNone/>
+              <a:defRPr sz="5120" b="1"/>
             </a:lvl8pPr>
-            <a:lvl9pPr marL="17556480" indent="0">
-              <a:buNone/>
-              <a:defRPr sz="7680" b="1"/>
+            <a:lvl9pPr marL="11704320" indent="0">
+              <a:buNone/>
+              <a:defRPr sz="5120" b="1"/>
             </a:lvl9pPr>
           </a:lstStyle>
           <a:p>
             <a:pPr lvl="0"/>
             <a:r>
               <a:rPr lang="en-US"/>
-              <a:t>Edit Master text styles</a:t>
+              <a:t>Click to edit Master text styles</a:t>
             </a:r>
           </a:p>
         </p:txBody>
@@ -1863,8 +1864,8 @@
         </p:nvSpPr>
         <p:spPr>
           <a:xfrm>
-            <a:off x="3401147" y="12024360"/>
-            <a:ext cx="20889036" cy="17686022"/>
+            <a:off x="2267431" y="8016240"/>
+            <a:ext cx="13926024" cy="11790682"/>
           </a:xfrm>
         </p:spPr>
         <p:txBody>
@@ -1874,7 +1875,7 @@
             <a:pPr lvl="0"/>
             <a:r>
               <a:rPr lang="en-US"/>
-              <a:t>Edit Master text styles</a:t>
+              <a:t>Click to edit Master text styles</a:t>
             </a:r>
           </a:p>
           <a:p>
@@ -1920,8 +1921,8 @@
         </p:nvSpPr>
         <p:spPr>
           <a:xfrm>
-            <a:off x="24997413" y="8069582"/>
-            <a:ext cx="20991911" cy="3954778"/>
+            <a:off x="16664942" y="5379722"/>
+            <a:ext cx="13994608" cy="2636518"/>
           </a:xfrm>
         </p:spPr>
         <p:txBody>
@@ -1929,46 +1930,46 @@
           <a:lstStyle>
             <a:lvl1pPr marL="0" indent="0">
               <a:buNone/>
-              <a:defRPr sz="11520" b="1"/>
+              <a:defRPr sz="7680" b="1"/>
             </a:lvl1pPr>
-            <a:lvl2pPr marL="2194560" indent="0">
-              <a:buNone/>
-              <a:defRPr sz="9600" b="1"/>
+            <a:lvl2pPr marL="1463040" indent="0">
+              <a:buNone/>
+              <a:defRPr sz="6400" b="1"/>
             </a:lvl2pPr>
-            <a:lvl3pPr marL="4389120" indent="0">
-              <a:buNone/>
-              <a:defRPr sz="8640" b="1"/>
+            <a:lvl3pPr marL="2926080" indent="0">
+              <a:buNone/>
+              <a:defRPr sz="5760" b="1"/>
             </a:lvl3pPr>
-            <a:lvl4pPr marL="6583680" indent="0">
-              <a:buNone/>
-              <a:defRPr sz="7680" b="1"/>
+            <a:lvl4pPr marL="4389120" indent="0">
+              <a:buNone/>
+              <a:defRPr sz="5120" b="1"/>
             </a:lvl4pPr>
-            <a:lvl5pPr marL="8778240" indent="0">
-              <a:buNone/>
-              <a:defRPr sz="7680" b="1"/>
+            <a:lvl5pPr marL="5852160" indent="0">
+              <a:buNone/>
+              <a:defRPr sz="5120" b="1"/>
             </a:lvl5pPr>
-            <a:lvl6pPr marL="10972800" indent="0">
-              <a:buNone/>
-              <a:defRPr sz="7680" b="1"/>
+            <a:lvl6pPr marL="7315200" indent="0">
+              <a:buNone/>
+              <a:defRPr sz="5120" b="1"/>
             </a:lvl6pPr>
-            <a:lvl7pPr marL="13167360" indent="0">
-              <a:buNone/>
-              <a:defRPr sz="7680" b="1"/>
+            <a:lvl7pPr marL="8778240" indent="0">
+              <a:buNone/>
+              <a:defRPr sz="5120" b="1"/>
             </a:lvl7pPr>
-            <a:lvl8pPr marL="15361920" indent="0">
-              <a:buNone/>
-              <a:defRPr sz="7680" b="1"/>
+            <a:lvl8pPr marL="10241280" indent="0">
+              <a:buNone/>
+              <a:defRPr sz="5120" b="1"/>
             </a:lvl8pPr>
-            <a:lvl9pPr marL="17556480" indent="0">
-              <a:buNone/>
-              <a:defRPr sz="7680" b="1"/>
+            <a:lvl9pPr marL="11704320" indent="0">
+              <a:buNone/>
+              <a:defRPr sz="5120" b="1"/>
             </a:lvl9pPr>
           </a:lstStyle>
           <a:p>
             <a:pPr lvl="0"/>
             <a:r>
               <a:rPr lang="en-US"/>
-              <a:t>Edit Master text styles</a:t>
+              <a:t>Click to edit Master text styles</a:t>
             </a:r>
           </a:p>
         </p:txBody>
@@ -1985,8 +1986,8 @@
         </p:nvSpPr>
         <p:spPr>
           <a:xfrm>
-            <a:off x="24997413" y="12024360"/>
-            <a:ext cx="20991911" cy="17686022"/>
+            <a:off x="16664942" y="8016240"/>
+            <a:ext cx="13994608" cy="11790682"/>
           </a:xfrm>
         </p:spPr>
         <p:txBody>
@@ -1996,7 +1997,7 @@
             <a:pPr lvl="0"/>
             <a:r>
               <a:rPr lang="en-US"/>
-              <a:t>Edit Master text styles</a:t>
+              <a:t>Click to edit Master text styles</a:t>
             </a:r>
           </a:p>
           <a:p>
@@ -2047,7 +2048,7 @@
           <a:p>
             <a:fld id="{3F135061-2F74-46D4-9F8F-C77EF304855D}" type="datetimeFigureOut">
               <a:rPr lang="en-US" smtClean="0"/>
-              <a:t>7/1/2025</a:t>
+              <a:t>6/28/26</a:t>
             </a:fld>
             <a:endParaRPr lang="en-US"/>
           </a:p>
@@ -2098,7 +2099,7 @@
     </p:spTree>
     <p:extLst>
       <p:ext uri="{BB962C8B-B14F-4D97-AF65-F5344CB8AC3E}">
-        <p14:creationId xmlns:p14="http://schemas.microsoft.com/office/powerpoint/2010/main" val="2738387381"/>
+        <p14:creationId xmlns:p14="http://schemas.microsoft.com/office/powerpoint/2010/main" val="29326515"/>
       </p:ext>
     </p:extLst>
   </p:cSld>
@@ -2165,7 +2166,7 @@
           <a:p>
             <a:fld id="{3F135061-2F74-46D4-9F8F-C77EF304855D}" type="datetimeFigureOut">
               <a:rPr lang="en-US" smtClean="0"/>
-              <a:t>7/1/2025</a:t>
+              <a:t>6/28/26</a:t>
             </a:fld>
             <a:endParaRPr lang="en-US"/>
           </a:p>
@@ -2216,7 +2217,7 @@
     </p:spTree>
     <p:extLst>
       <p:ext uri="{BB962C8B-B14F-4D97-AF65-F5344CB8AC3E}">
-        <p14:creationId xmlns:p14="http://schemas.microsoft.com/office/powerpoint/2010/main" val="3420506144"/>
+        <p14:creationId xmlns:p14="http://schemas.microsoft.com/office/powerpoint/2010/main" val="568952969"/>
       </p:ext>
     </p:extLst>
   </p:cSld>
@@ -2260,7 +2261,7 @@
           <a:p>
             <a:fld id="{3F135061-2F74-46D4-9F8F-C77EF304855D}" type="datetimeFigureOut">
               <a:rPr lang="en-US" smtClean="0"/>
-              <a:t>7/1/2025</a:t>
+              <a:t>6/28/26</a:t>
             </a:fld>
             <a:endParaRPr lang="en-US"/>
           </a:p>
@@ -2311,7 +2312,7 @@
     </p:spTree>
     <p:extLst>
       <p:ext uri="{BB962C8B-B14F-4D97-AF65-F5344CB8AC3E}">
-        <p14:creationId xmlns:p14="http://schemas.microsoft.com/office/powerpoint/2010/main" val="2705658520"/>
+        <p14:creationId xmlns:p14="http://schemas.microsoft.com/office/powerpoint/2010/main" val="1857686713"/>
       </p:ext>
     </p:extLst>
   </p:cSld>
@@ -2350,15 +2351,15 @@
         </p:nvSpPr>
         <p:spPr>
           <a:xfrm>
-            <a:off x="3401142" y="2194560"/>
-            <a:ext cx="15925561" cy="7680960"/>
+            <a:off x="2267428" y="1463040"/>
+            <a:ext cx="10617041" cy="5120640"/>
           </a:xfrm>
         </p:spPr>
         <p:txBody>
           <a:bodyPr anchor="b"/>
           <a:lstStyle>
             <a:lvl1pPr>
-              <a:defRPr sz="15360"/>
+              <a:defRPr sz="10240"/>
             </a:lvl1pPr>
           </a:lstStyle>
           <a:p>
@@ -2382,46 +2383,46 @@
         </p:nvSpPr>
         <p:spPr>
           <a:xfrm>
-            <a:off x="20991911" y="4739647"/>
-            <a:ext cx="24997410" cy="23393400"/>
+            <a:off x="13994608" y="3159765"/>
+            <a:ext cx="16664940" cy="15595600"/>
           </a:xfrm>
         </p:spPr>
         <p:txBody>
           <a:bodyPr/>
           <a:lstStyle>
             <a:lvl1pPr>
-              <a:defRPr sz="15360"/>
+              <a:defRPr sz="10240"/>
             </a:lvl1pPr>
             <a:lvl2pPr>
-              <a:defRPr sz="13440"/>
+              <a:defRPr sz="8960"/>
             </a:lvl2pPr>
             <a:lvl3pPr>
-              <a:defRPr sz="11520"/>
+              <a:defRPr sz="7680"/>
             </a:lvl3pPr>
             <a:lvl4pPr>
-              <a:defRPr sz="9600"/>
+              <a:defRPr sz="6400"/>
             </a:lvl4pPr>
             <a:lvl5pPr>
-              <a:defRPr sz="9600"/>
+              <a:defRPr sz="6400"/>
             </a:lvl5pPr>
             <a:lvl6pPr>
-              <a:defRPr sz="9600"/>
+              <a:defRPr sz="6400"/>
             </a:lvl6pPr>
             <a:lvl7pPr>
-              <a:defRPr sz="9600"/>
+              <a:defRPr sz="6400"/>
             </a:lvl7pPr>
             <a:lvl8pPr>
-              <a:defRPr sz="9600"/>
+              <a:defRPr sz="6400"/>
             </a:lvl8pPr>
             <a:lvl9pPr>
-              <a:defRPr sz="9600"/>
+              <a:defRPr sz="6400"/>
             </a:lvl9pPr>
           </a:lstStyle>
           <a:p>
             <a:pPr lvl="0"/>
             <a:r>
               <a:rPr lang="en-US"/>
-              <a:t>Edit Master text styles</a:t>
+              <a:t>Click to edit Master text styles</a:t>
             </a:r>
           </a:p>
           <a:p>
@@ -2467,8 +2468,8 @@
         </p:nvSpPr>
         <p:spPr>
           <a:xfrm>
-            <a:off x="3401142" y="9875520"/>
-            <a:ext cx="15925561" cy="18295622"/>
+            <a:off x="2267428" y="6583680"/>
+            <a:ext cx="10617041" cy="12197082"/>
           </a:xfrm>
         </p:spPr>
         <p:txBody>
@@ -2476,46 +2477,46 @@
           <a:lstStyle>
             <a:lvl1pPr marL="0" indent="0">
               <a:buNone/>
-              <a:defRPr sz="7680"/>
+              <a:defRPr sz="5120"/>
             </a:lvl1pPr>
-            <a:lvl2pPr marL="2194560" indent="0">
-              <a:buNone/>
-              <a:defRPr sz="6720"/>
+            <a:lvl2pPr marL="1463040" indent="0">
+              <a:buNone/>
+              <a:defRPr sz="4480"/>
             </a:lvl2pPr>
-            <a:lvl3pPr marL="4389120" indent="0">
-              <a:buNone/>
-              <a:defRPr sz="5760"/>
+            <a:lvl3pPr marL="2926080" indent="0">
+              <a:buNone/>
+              <a:defRPr sz="3840"/>
             </a:lvl3pPr>
-            <a:lvl4pPr marL="6583680" indent="0">
-              <a:buNone/>
-              <a:defRPr sz="4800"/>
+            <a:lvl4pPr marL="4389120" indent="0">
+              <a:buNone/>
+              <a:defRPr sz="3200"/>
             </a:lvl4pPr>
-            <a:lvl5pPr marL="8778240" indent="0">
-              <a:buNone/>
-              <a:defRPr sz="4800"/>
+            <a:lvl5pPr marL="5852160" indent="0">
+              <a:buNone/>
+              <a:defRPr sz="3200"/>
             </a:lvl5pPr>
-            <a:lvl6pPr marL="10972800" indent="0">
-              <a:buNone/>
-              <a:defRPr sz="4800"/>
+            <a:lvl6pPr marL="7315200" indent="0">
+              <a:buNone/>
+              <a:defRPr sz="3200"/>
             </a:lvl6pPr>
-            <a:lvl7pPr marL="13167360" indent="0">
-              <a:buNone/>
-              <a:defRPr sz="4800"/>
+            <a:lvl7pPr marL="8778240" indent="0">
+              <a:buNone/>
+              <a:defRPr sz="3200"/>
             </a:lvl7pPr>
-            <a:lvl8pPr marL="15361920" indent="0">
-              <a:buNone/>
-              <a:defRPr sz="4800"/>
+            <a:lvl8pPr marL="10241280" indent="0">
+              <a:buNone/>
+              <a:defRPr sz="3200"/>
             </a:lvl8pPr>
-            <a:lvl9pPr marL="17556480" indent="0">
-              <a:buNone/>
-              <a:defRPr sz="4800"/>
+            <a:lvl9pPr marL="11704320" indent="0">
+              <a:buNone/>
+              <a:defRPr sz="3200"/>
             </a:lvl9pPr>
           </a:lstStyle>
           <a:p>
             <a:pPr lvl="0"/>
             <a:r>
               <a:rPr lang="en-US"/>
-              <a:t>Edit Master text styles</a:t>
+              <a:t>Click to edit Master text styles</a:t>
             </a:r>
           </a:p>
         </p:txBody>
@@ -2537,7 +2538,7 @@
           <a:p>
             <a:fld id="{3F135061-2F74-46D4-9F8F-C77EF304855D}" type="datetimeFigureOut">
               <a:rPr lang="en-US" smtClean="0"/>
-              <a:t>7/1/2025</a:t>
+              <a:t>6/28/26</a:t>
             </a:fld>
             <a:endParaRPr lang="en-US"/>
           </a:p>
@@ -2588,7 +2589,7 @@
     </p:spTree>
     <p:extLst>
       <p:ext uri="{BB962C8B-B14F-4D97-AF65-F5344CB8AC3E}">
-        <p14:creationId xmlns:p14="http://schemas.microsoft.com/office/powerpoint/2010/main" val="1446394513"/>
+        <p14:creationId xmlns:p14="http://schemas.microsoft.com/office/powerpoint/2010/main" val="3189449589"/>
       </p:ext>
     </p:extLst>
   </p:cSld>
@@ -2627,15 +2628,15 @@
         </p:nvSpPr>
         <p:spPr>
           <a:xfrm>
-            <a:off x="3401142" y="2194560"/>
-            <a:ext cx="15925561" cy="7680960"/>
+            <a:off x="2267428" y="1463040"/>
+            <a:ext cx="10617041" cy="5120640"/>
           </a:xfrm>
         </p:spPr>
         <p:txBody>
           <a:bodyPr anchor="b"/>
           <a:lstStyle>
             <a:lvl1pPr>
-              <a:defRPr sz="15360"/>
+              <a:defRPr sz="10240"/>
             </a:lvl1pPr>
           </a:lstStyle>
           <a:p>
@@ -2659,8 +2660,8 @@
         </p:nvSpPr>
         <p:spPr>
           <a:xfrm>
-            <a:off x="20991911" y="4739647"/>
-            <a:ext cx="24997410" cy="23393400"/>
+            <a:off x="13994608" y="3159765"/>
+            <a:ext cx="16664940" cy="15595600"/>
           </a:xfrm>
         </p:spPr>
         <p:txBody>
@@ -2668,39 +2669,39 @@
           <a:lstStyle>
             <a:lvl1pPr marL="0" indent="0">
               <a:buNone/>
-              <a:defRPr sz="15360"/>
+              <a:defRPr sz="10240"/>
             </a:lvl1pPr>
-            <a:lvl2pPr marL="2194560" indent="0">
-              <a:buNone/>
-              <a:defRPr sz="13440"/>
+            <a:lvl2pPr marL="1463040" indent="0">
+              <a:buNone/>
+              <a:defRPr sz="8960"/>
             </a:lvl2pPr>
-            <a:lvl3pPr marL="4389120" indent="0">
-              <a:buNone/>
-              <a:defRPr sz="11520"/>
+            <a:lvl3pPr marL="2926080" indent="0">
+              <a:buNone/>
+              <a:defRPr sz="7680"/>
             </a:lvl3pPr>
-            <a:lvl4pPr marL="6583680" indent="0">
-              <a:buNone/>
-              <a:defRPr sz="9600"/>
+            <a:lvl4pPr marL="4389120" indent="0">
+              <a:buNone/>
+              <a:defRPr sz="6400"/>
             </a:lvl4pPr>
-            <a:lvl5pPr marL="8778240" indent="0">
-              <a:buNone/>
-              <a:defRPr sz="9600"/>
+            <a:lvl5pPr marL="5852160" indent="0">
+              <a:buNone/>
+              <a:defRPr sz="6400"/>
             </a:lvl5pPr>
-            <a:lvl6pPr marL="10972800" indent="0">
-              <a:buNone/>
-              <a:defRPr sz="9600"/>
+            <a:lvl6pPr marL="7315200" indent="0">
+              <a:buNone/>
+              <a:defRPr sz="6400"/>
             </a:lvl6pPr>
-            <a:lvl7pPr marL="13167360" indent="0">
-              <a:buNone/>
-              <a:defRPr sz="9600"/>
+            <a:lvl7pPr marL="8778240" indent="0">
+              <a:buNone/>
+              <a:defRPr sz="6400"/>
             </a:lvl7pPr>
-            <a:lvl8pPr marL="15361920" indent="0">
-              <a:buNone/>
-              <a:defRPr sz="9600"/>
+            <a:lvl8pPr marL="10241280" indent="0">
+              <a:buNone/>
+              <a:defRPr sz="6400"/>
             </a:lvl8pPr>
-            <a:lvl9pPr marL="17556480" indent="0">
-              <a:buNone/>
-              <a:defRPr sz="9600"/>
+            <a:lvl9pPr marL="11704320" indent="0">
+              <a:buNone/>
+              <a:defRPr sz="6400"/>
             </a:lvl9pPr>
           </a:lstStyle>
           <a:p>
@@ -2724,8 +2725,8 @@
         </p:nvSpPr>
         <p:spPr>
           <a:xfrm>
-            <a:off x="3401142" y="9875520"/>
-            <a:ext cx="15925561" cy="18295622"/>
+            <a:off x="2267428" y="6583680"/>
+            <a:ext cx="10617041" cy="12197082"/>
           </a:xfrm>
         </p:spPr>
         <p:txBody>
@@ -2733,46 +2734,46 @@
           <a:lstStyle>
             <a:lvl1pPr marL="0" indent="0">
               <a:buNone/>
-              <a:defRPr sz="7680"/>
+              <a:defRPr sz="5120"/>
             </a:lvl1pPr>
-            <a:lvl2pPr marL="2194560" indent="0">
-              <a:buNone/>
-              <a:defRPr sz="6720"/>
+            <a:lvl2pPr marL="1463040" indent="0">
+              <a:buNone/>
+              <a:defRPr sz="4480"/>
             </a:lvl2pPr>
-            <a:lvl3pPr marL="4389120" indent="0">
-              <a:buNone/>
-              <a:defRPr sz="5760"/>
+            <a:lvl3pPr marL="2926080" indent="0">
+              <a:buNone/>
+              <a:defRPr sz="3840"/>
             </a:lvl3pPr>
-            <a:lvl4pPr marL="6583680" indent="0">
-              <a:buNone/>
-              <a:defRPr sz="4800"/>
+            <a:lvl4pPr marL="4389120" indent="0">
+              <a:buNone/>
+              <a:defRPr sz="3200"/>
             </a:lvl4pPr>
-            <a:lvl5pPr marL="8778240" indent="0">
-              <a:buNone/>
-              <a:defRPr sz="4800"/>
+            <a:lvl5pPr marL="5852160" indent="0">
+              <a:buNone/>
+              <a:defRPr sz="3200"/>
             </a:lvl5pPr>
-            <a:lvl6pPr marL="10972800" indent="0">
-              <a:buNone/>
-              <a:defRPr sz="4800"/>
+            <a:lvl6pPr marL="7315200" indent="0">
+              <a:buNone/>
+              <a:defRPr sz="3200"/>
             </a:lvl6pPr>
-            <a:lvl7pPr marL="13167360" indent="0">
-              <a:buNone/>
-              <a:defRPr sz="4800"/>
+            <a:lvl7pPr marL="8778240" indent="0">
+              <a:buNone/>
+              <a:defRPr sz="3200"/>
             </a:lvl7pPr>
-            <a:lvl8pPr marL="15361920" indent="0">
-              <a:buNone/>
-              <a:defRPr sz="4800"/>
+            <a:lvl8pPr marL="10241280" indent="0">
+              <a:buNone/>
+              <a:defRPr sz="3200"/>
             </a:lvl8pPr>
-            <a:lvl9pPr marL="17556480" indent="0">
-              <a:buNone/>
-              <a:defRPr sz="4800"/>
+            <a:lvl9pPr marL="11704320" indent="0">
+              <a:buNone/>
+              <a:defRPr sz="3200"/>
             </a:lvl9pPr>
           </a:lstStyle>
           <a:p>
             <a:pPr lvl="0"/>
             <a:r>
               <a:rPr lang="en-US"/>
-              <a:t>Edit Master text styles</a:t>
+              <a:t>Click to edit Master text styles</a:t>
             </a:r>
           </a:p>
         </p:txBody>
@@ -2794,7 +2795,7 @@
           <a:p>
             <a:fld id="{3F135061-2F74-46D4-9F8F-C77EF304855D}" type="datetimeFigureOut">
               <a:rPr lang="en-US" smtClean="0"/>
-              <a:t>7/1/2025</a:t>
+              <a:t>6/28/26</a:t>
             </a:fld>
             <a:endParaRPr lang="en-US"/>
           </a:p>
@@ -2845,7 +2846,7 @@
     </p:spTree>
     <p:extLst>
       <p:ext uri="{BB962C8B-B14F-4D97-AF65-F5344CB8AC3E}">
-        <p14:creationId xmlns:p14="http://schemas.microsoft.com/office/powerpoint/2010/main" val="620014181"/>
+        <p14:creationId xmlns:p14="http://schemas.microsoft.com/office/powerpoint/2010/main" val="962251459"/>
       </p:ext>
     </p:extLst>
   </p:cSld>
@@ -2889,8 +2890,8 @@
         </p:nvSpPr>
         <p:spPr>
           <a:xfrm>
-            <a:off x="3394710" y="1752607"/>
-            <a:ext cx="42588180" cy="6362702"/>
+            <a:off x="2263140" y="1168405"/>
+            <a:ext cx="28392120" cy="4241802"/>
           </a:xfrm>
           <a:prstGeom prst="rect">
             <a:avLst/>
@@ -2922,8 +2923,8 @@
         </p:nvSpPr>
         <p:spPr>
           <a:xfrm>
-            <a:off x="3394710" y="8763000"/>
-            <a:ext cx="42588180" cy="20886422"/>
+            <a:off x="2263140" y="5842000"/>
+            <a:ext cx="28392120" cy="13924282"/>
           </a:xfrm>
           <a:prstGeom prst="rect">
             <a:avLst/>
@@ -2938,7 +2939,7 @@
             <a:pPr lvl="0"/>
             <a:r>
               <a:rPr lang="en-US"/>
-              <a:t>Edit Master text styles</a:t>
+              <a:t>Click to edit Master text styles</a:t>
             </a:r>
           </a:p>
           <a:p>
@@ -2984,8 +2985,8 @@
         </p:nvSpPr>
         <p:spPr>
           <a:xfrm>
-            <a:off x="3394710" y="30510487"/>
-            <a:ext cx="11109960" cy="1752600"/>
+            <a:off x="2263140" y="20340325"/>
+            <a:ext cx="7406640" cy="1168400"/>
           </a:xfrm>
           <a:prstGeom prst="rect">
             <a:avLst/>
@@ -2995,7 +2996,7 @@
           <a:bodyPr vert="horz" lIns="91440" tIns="45720" rIns="91440" bIns="45720" rtlCol="0" anchor="ctr"/>
           <a:lstStyle>
             <a:lvl1pPr algn="l">
-              <a:defRPr sz="5760">
+              <a:defRPr sz="3840">
                 <a:solidFill>
                   <a:schemeClr val="tx1">
                     <a:tint val="75000"/>
@@ -3007,7 +3008,7 @@
           <a:p>
             <a:fld id="{3F135061-2F74-46D4-9F8F-C77EF304855D}" type="datetimeFigureOut">
               <a:rPr lang="en-US" smtClean="0"/>
-              <a:t>7/1/2025</a:t>
+              <a:t>6/28/26</a:t>
             </a:fld>
             <a:endParaRPr lang="en-US"/>
           </a:p>
@@ -3025,8 +3026,8 @@
         </p:nvSpPr>
         <p:spPr>
           <a:xfrm>
-            <a:off x="16356330" y="30510487"/>
-            <a:ext cx="16664940" cy="1752600"/>
+            <a:off x="10904220" y="20340325"/>
+            <a:ext cx="11109960" cy="1168400"/>
           </a:xfrm>
           <a:prstGeom prst="rect">
             <a:avLst/>
@@ -3036,7 +3037,7 @@
           <a:bodyPr vert="horz" lIns="91440" tIns="45720" rIns="91440" bIns="45720" rtlCol="0" anchor="ctr"/>
           <a:lstStyle>
             <a:lvl1pPr algn="ctr">
-              <a:defRPr sz="5760">
+              <a:defRPr sz="3840">
                 <a:solidFill>
                   <a:schemeClr val="tx1">
                     <a:tint val="75000"/>
@@ -3062,8 +3063,8 @@
         </p:nvSpPr>
         <p:spPr>
           <a:xfrm>
-            <a:off x="34872930" y="30510487"/>
-            <a:ext cx="11109960" cy="1752600"/>
+            <a:off x="23248620" y="20340325"/>
+            <a:ext cx="7406640" cy="1168400"/>
           </a:xfrm>
           <a:prstGeom prst="rect">
             <a:avLst/>
@@ -3073,7 +3074,7 @@
           <a:bodyPr vert="horz" lIns="91440" tIns="45720" rIns="91440" bIns="45720" rtlCol="0" anchor="ctr"/>
           <a:lstStyle>
             <a:lvl1pPr algn="r">
-              <a:defRPr sz="5760">
+              <a:defRPr sz="3840">
                 <a:solidFill>
                   <a:schemeClr val="tx1">
                     <a:tint val="75000"/>
@@ -3094,27 +3095,27 @@
     </p:spTree>
     <p:extLst>
       <p:ext uri="{BB962C8B-B14F-4D97-AF65-F5344CB8AC3E}">
-        <p14:creationId xmlns:p14="http://schemas.microsoft.com/office/powerpoint/2010/main" val="2343206075"/>
+        <p14:creationId xmlns:p14="http://schemas.microsoft.com/office/powerpoint/2010/main" val="4175933333"/>
       </p:ext>
     </p:extLst>
   </p:cSld>
   <p:clrMap bg1="lt1" tx1="dk1" bg2="lt2" tx2="dk2" accent1="accent1" accent2="accent2" accent3="accent3" accent4="accent4" accent5="accent5" accent6="accent6" hlink="hlink" folHlink="folHlink"/>
   <p:sldLayoutIdLst>
-    <p:sldLayoutId id="2147483661" r:id="rId1"/>
-    <p:sldLayoutId id="2147483662" r:id="rId2"/>
-    <p:sldLayoutId id="2147483663" r:id="rId3"/>
-    <p:sldLayoutId id="2147483664" r:id="rId4"/>
-    <p:sldLayoutId id="2147483665" r:id="rId5"/>
-    <p:sldLayoutId id="2147483666" r:id="rId6"/>
-    <p:sldLayoutId id="2147483667" r:id="rId7"/>
-    <p:sldLayoutId id="2147483668" r:id="rId8"/>
-    <p:sldLayoutId id="2147483669" r:id="rId9"/>
-    <p:sldLayoutId id="2147483670" r:id="rId10"/>
-    <p:sldLayoutId id="2147483671" r:id="rId11"/>
+    <p:sldLayoutId id="2147483673" r:id="rId1"/>
+    <p:sldLayoutId id="2147483674" r:id="rId2"/>
+    <p:sldLayoutId id="2147483675" r:id="rId3"/>
+    <p:sldLayoutId id="2147483676" r:id="rId4"/>
+    <p:sldLayoutId id="2147483677" r:id="rId5"/>
+    <p:sldLayoutId id="2147483678" r:id="rId6"/>
+    <p:sldLayoutId id="2147483679" r:id="rId7"/>
+    <p:sldLayoutId id="2147483680" r:id="rId8"/>
+    <p:sldLayoutId id="2147483681" r:id="rId9"/>
+    <p:sldLayoutId id="2147483682" r:id="rId10"/>
+    <p:sldLayoutId id="2147483683" r:id="rId11"/>
   </p:sldLayoutIdLst>
   <p:txStyles>
     <p:titleStyle>
-      <a:lvl1pPr algn="l" defTabSz="4389120" rtl="0" eaLnBrk="1" latinLnBrk="0" hangingPunct="1">
+      <a:lvl1pPr algn="l" defTabSz="2926080" rtl="0" eaLnBrk="1" latinLnBrk="0" hangingPunct="1">
         <a:lnSpc>
           <a:spcPct val="90000"/>
         </a:lnSpc>
@@ -3122,7 +3123,7 @@
           <a:spcPct val="0"/>
         </a:spcBef>
         <a:buNone/>
-        <a:defRPr sz="21120" kern="1200">
+        <a:defRPr sz="14080" kern="1200">
           <a:solidFill>
             <a:schemeClr val="tx1"/>
           </a:solidFill>
@@ -3133,16 +3134,16 @@
       </a:lvl1pPr>
     </p:titleStyle>
     <p:bodyStyle>
-      <a:lvl1pPr marL="1097280" indent="-1097280" algn="l" defTabSz="4389120" rtl="0" eaLnBrk="1" latinLnBrk="0" hangingPunct="1">
+      <a:lvl1pPr marL="731520" indent="-731520" algn="l" defTabSz="2926080" rtl="0" eaLnBrk="1" latinLnBrk="0" hangingPunct="1">
         <a:lnSpc>
           <a:spcPct val="90000"/>
         </a:lnSpc>
         <a:spcBef>
-          <a:spcPts val="4800"/>
+          <a:spcPts val="3200"/>
         </a:spcBef>
         <a:buFont typeface="Arial" panose="020B0604020202020204" pitchFamily="34" charset="0"/>
         <a:buChar char="•"/>
-        <a:defRPr sz="13440" kern="1200">
+        <a:defRPr sz="8960" kern="1200">
           <a:solidFill>
             <a:schemeClr val="tx1"/>
           </a:solidFill>
@@ -3151,16 +3152,16 @@
           <a:cs typeface="+mn-cs"/>
         </a:defRPr>
       </a:lvl1pPr>
-      <a:lvl2pPr marL="3291840" indent="-1097280" algn="l" defTabSz="4389120" rtl="0" eaLnBrk="1" latinLnBrk="0" hangingPunct="1">
+      <a:lvl2pPr marL="2194560" indent="-731520" algn="l" defTabSz="2926080" rtl="0" eaLnBrk="1" latinLnBrk="0" hangingPunct="1">
         <a:lnSpc>
           <a:spcPct val="90000"/>
         </a:lnSpc>
         <a:spcBef>
-          <a:spcPts val="2400"/>
+          <a:spcPts val="1600"/>
         </a:spcBef>
         <a:buFont typeface="Arial" panose="020B0604020202020204" pitchFamily="34" charset="0"/>
         <a:buChar char="•"/>
-        <a:defRPr sz="11520" kern="1200">
+        <a:defRPr sz="7680" kern="1200">
           <a:solidFill>
             <a:schemeClr val="tx1"/>
           </a:solidFill>
@@ -3169,16 +3170,16 @@
           <a:cs typeface="+mn-cs"/>
         </a:defRPr>
       </a:lvl2pPr>
-      <a:lvl3pPr marL="5486400" indent="-1097280" algn="l" defTabSz="4389120" rtl="0" eaLnBrk="1" latinLnBrk="0" hangingPunct="1">
+      <a:lvl3pPr marL="3657600" indent="-731520" algn="l" defTabSz="2926080" rtl="0" eaLnBrk="1" latinLnBrk="0" hangingPunct="1">
         <a:lnSpc>
           <a:spcPct val="90000"/>
         </a:lnSpc>
         <a:spcBef>
-          <a:spcPts val="2400"/>
+          <a:spcPts val="1600"/>
         </a:spcBef>
         <a:buFont typeface="Arial" panose="020B0604020202020204" pitchFamily="34" charset="0"/>
         <a:buChar char="•"/>
-        <a:defRPr sz="9600" kern="1200">
+        <a:defRPr sz="6400" kern="1200">
           <a:solidFill>
             <a:schemeClr val="tx1"/>
           </a:solidFill>
@@ -3187,16 +3188,16 @@
           <a:cs typeface="+mn-cs"/>
         </a:defRPr>
       </a:lvl3pPr>
-      <a:lvl4pPr marL="7680960" indent="-1097280" algn="l" defTabSz="4389120" rtl="0" eaLnBrk="1" latinLnBrk="0" hangingPunct="1">
+      <a:lvl4pPr marL="5120640" indent="-731520" algn="l" defTabSz="2926080" rtl="0" eaLnBrk="1" latinLnBrk="0" hangingPunct="1">
         <a:lnSpc>
           <a:spcPct val="90000"/>
         </a:lnSpc>
         <a:spcBef>
-          <a:spcPts val="2400"/>
+          <a:spcPts val="1600"/>
         </a:spcBef>
         <a:buFont typeface="Arial" panose="020B0604020202020204" pitchFamily="34" charset="0"/>
         <a:buChar char="•"/>
-        <a:defRPr sz="8640" kern="1200">
+        <a:defRPr sz="5760" kern="1200">
           <a:solidFill>
             <a:schemeClr val="tx1"/>
           </a:solidFill>
@@ -3205,16 +3206,16 @@
           <a:cs typeface="+mn-cs"/>
         </a:defRPr>
       </a:lvl4pPr>
-      <a:lvl5pPr marL="9875520" indent="-1097280" algn="l" defTabSz="4389120" rtl="0" eaLnBrk="1" latinLnBrk="0" hangingPunct="1">
+      <a:lvl5pPr marL="6583680" indent="-731520" algn="l" defTabSz="2926080" rtl="0" eaLnBrk="1" latinLnBrk="0" hangingPunct="1">
         <a:lnSpc>
           <a:spcPct val="90000"/>
         </a:lnSpc>
         <a:spcBef>
-          <a:spcPts val="2400"/>
+          <a:spcPts val="1600"/>
         </a:spcBef>
         <a:buFont typeface="Arial" panose="020B0604020202020204" pitchFamily="34" charset="0"/>
         <a:buChar char="•"/>
-        <a:defRPr sz="8640" kern="1200">
+        <a:defRPr sz="5760" kern="1200">
           <a:solidFill>
             <a:schemeClr val="tx1"/>
           </a:solidFill>
@@ -3223,16 +3224,16 @@
           <a:cs typeface="+mn-cs"/>
         </a:defRPr>
       </a:lvl5pPr>
-      <a:lvl6pPr marL="12070080" indent="-1097280" algn="l" defTabSz="4389120" rtl="0" eaLnBrk="1" latinLnBrk="0" hangingPunct="1">
+      <a:lvl6pPr marL="8046720" indent="-731520" algn="l" defTabSz="2926080" rtl="0" eaLnBrk="1" latinLnBrk="0" hangingPunct="1">
         <a:lnSpc>
           <a:spcPct val="90000"/>
         </a:lnSpc>
         <a:spcBef>
-          <a:spcPts val="2400"/>
+          <a:spcPts val="1600"/>
         </a:spcBef>
         <a:buFont typeface="Arial" panose="020B0604020202020204" pitchFamily="34" charset="0"/>
         <a:buChar char="•"/>
-        <a:defRPr sz="8640" kern="1200">
+        <a:defRPr sz="5760" kern="1200">
           <a:solidFill>
             <a:schemeClr val="tx1"/>
           </a:solidFill>
@@ -3241,16 +3242,16 @@
           <a:cs typeface="+mn-cs"/>
         </a:defRPr>
       </a:lvl6pPr>
-      <a:lvl7pPr marL="14264640" indent="-1097280" algn="l" defTabSz="4389120" rtl="0" eaLnBrk="1" latinLnBrk="0" hangingPunct="1">
+      <a:lvl7pPr marL="9509760" indent="-731520" algn="l" defTabSz="2926080" rtl="0" eaLnBrk="1" latinLnBrk="0" hangingPunct="1">
         <a:lnSpc>
           <a:spcPct val="90000"/>
         </a:lnSpc>
         <a:spcBef>
-          <a:spcPts val="2400"/>
+          <a:spcPts val="1600"/>
         </a:spcBef>
         <a:buFont typeface="Arial" panose="020B0604020202020204" pitchFamily="34" charset="0"/>
         <a:buChar char="•"/>
-        <a:defRPr sz="8640" kern="1200">
+        <a:defRPr sz="5760" kern="1200">
           <a:solidFill>
             <a:schemeClr val="tx1"/>
           </a:solidFill>
@@ -3259,16 +3260,16 @@
           <a:cs typeface="+mn-cs"/>
         </a:defRPr>
       </a:lvl7pPr>
-      <a:lvl8pPr marL="16459200" indent="-1097280" algn="l" defTabSz="4389120" rtl="0" eaLnBrk="1" latinLnBrk="0" hangingPunct="1">
+      <a:lvl8pPr marL="10972800" indent="-731520" algn="l" defTabSz="2926080" rtl="0" eaLnBrk="1" latinLnBrk="0" hangingPunct="1">
         <a:lnSpc>
           <a:spcPct val="90000"/>
         </a:lnSpc>
         <a:spcBef>
-          <a:spcPts val="2400"/>
+          <a:spcPts val="1600"/>
         </a:spcBef>
         <a:buFont typeface="Arial" panose="020B0604020202020204" pitchFamily="34" charset="0"/>
         <a:buChar char="•"/>
-        <a:defRPr sz="8640" kern="1200">
+        <a:defRPr sz="5760" kern="1200">
           <a:solidFill>
             <a:schemeClr val="tx1"/>
           </a:solidFill>
@@ -3277,16 +3278,16 @@
           <a:cs typeface="+mn-cs"/>
         </a:defRPr>
       </a:lvl8pPr>
-      <a:lvl9pPr marL="18653760" indent="-1097280" algn="l" defTabSz="4389120" rtl="0" eaLnBrk="1" latinLnBrk="0" hangingPunct="1">
+      <a:lvl9pPr marL="12435840" indent="-731520" algn="l" defTabSz="2926080" rtl="0" eaLnBrk="1" latinLnBrk="0" hangingPunct="1">
         <a:lnSpc>
           <a:spcPct val="90000"/>
         </a:lnSpc>
         <a:spcBef>
-          <a:spcPts val="2400"/>
+          <a:spcPts val="1600"/>
         </a:spcBef>
         <a:buFont typeface="Arial" panose="020B0604020202020204" pitchFamily="34" charset="0"/>
         <a:buChar char="•"/>
-        <a:defRPr sz="8640" kern="1200">
+        <a:defRPr sz="5760" kern="1200">
           <a:solidFill>
             <a:schemeClr val="tx1"/>
           </a:solidFill>
@@ -3300,8 +3301,8 @@
       <a:defPPr>
         <a:defRPr lang="en-US"/>
       </a:defPPr>
-      <a:lvl1pPr marL="0" algn="l" defTabSz="4389120" rtl="0" eaLnBrk="1" latinLnBrk="0" hangingPunct="1">
-        <a:defRPr sz="8640" kern="1200">
+      <a:lvl1pPr marL="0" algn="l" defTabSz="2926080" rtl="0" eaLnBrk="1" latinLnBrk="0" hangingPunct="1">
+        <a:defRPr sz="5760" kern="1200">
           <a:solidFill>
             <a:schemeClr val="tx1"/>
           </a:solidFill>
@@ -3310,8 +3311,8 @@
           <a:cs typeface="+mn-cs"/>
         </a:defRPr>
       </a:lvl1pPr>
-      <a:lvl2pPr marL="2194560" algn="l" defTabSz="4389120" rtl="0" eaLnBrk="1" latinLnBrk="0" hangingPunct="1">
-        <a:defRPr sz="8640" kern="1200">
+      <a:lvl2pPr marL="1463040" algn="l" defTabSz="2926080" rtl="0" eaLnBrk="1" latinLnBrk="0" hangingPunct="1">
+        <a:defRPr sz="5760" kern="1200">
           <a:solidFill>
             <a:schemeClr val="tx1"/>
           </a:solidFill>
@@ -3320,8 +3321,8 @@
           <a:cs typeface="+mn-cs"/>
         </a:defRPr>
       </a:lvl2pPr>
-      <a:lvl3pPr marL="4389120" algn="l" defTabSz="4389120" rtl="0" eaLnBrk="1" latinLnBrk="0" hangingPunct="1">
-        <a:defRPr sz="8640" kern="1200">
+      <a:lvl3pPr marL="2926080" algn="l" defTabSz="2926080" rtl="0" eaLnBrk="1" latinLnBrk="0" hangingPunct="1">
+        <a:defRPr sz="5760" kern="1200">
           <a:solidFill>
             <a:schemeClr val="tx1"/>
           </a:solidFill>
@@ -3330,8 +3331,8 @@
           <a:cs typeface="+mn-cs"/>
         </a:defRPr>
       </a:lvl3pPr>
-      <a:lvl4pPr marL="6583680" algn="l" defTabSz="4389120" rtl="0" eaLnBrk="1" latinLnBrk="0" hangingPunct="1">
-        <a:defRPr sz="8640" kern="1200">
+      <a:lvl4pPr marL="4389120" algn="l" defTabSz="2926080" rtl="0" eaLnBrk="1" latinLnBrk="0" hangingPunct="1">
+        <a:defRPr sz="5760" kern="1200">
           <a:solidFill>
             <a:schemeClr val="tx1"/>
           </a:solidFill>
@@ -3340,8 +3341,8 @@
           <a:cs typeface="+mn-cs"/>
         </a:defRPr>
       </a:lvl4pPr>
-      <a:lvl5pPr marL="8778240" algn="l" defTabSz="4389120" rtl="0" eaLnBrk="1" latinLnBrk="0" hangingPunct="1">
-        <a:defRPr sz="8640" kern="1200">
+      <a:lvl5pPr marL="5852160" algn="l" defTabSz="2926080" rtl="0" eaLnBrk="1" latinLnBrk="0" hangingPunct="1">
+        <a:defRPr sz="5760" kern="1200">
           <a:solidFill>
             <a:schemeClr val="tx1"/>
           </a:solidFill>
@@ -3350,8 +3351,8 @@
           <a:cs typeface="+mn-cs"/>
         </a:defRPr>
       </a:lvl5pPr>
-      <a:lvl6pPr marL="10972800" algn="l" defTabSz="4389120" rtl="0" eaLnBrk="1" latinLnBrk="0" hangingPunct="1">
-        <a:defRPr sz="8640" kern="1200">
+      <a:lvl6pPr marL="7315200" algn="l" defTabSz="2926080" rtl="0" eaLnBrk="1" latinLnBrk="0" hangingPunct="1">
+        <a:defRPr sz="5760" kern="1200">
           <a:solidFill>
             <a:schemeClr val="tx1"/>
           </a:solidFill>
@@ -3360,8 +3361,8 @@
           <a:cs typeface="+mn-cs"/>
         </a:defRPr>
       </a:lvl6pPr>
-      <a:lvl7pPr marL="13167360" algn="l" defTabSz="4389120" rtl="0" eaLnBrk="1" latinLnBrk="0" hangingPunct="1">
-        <a:defRPr sz="8640" kern="1200">
+      <a:lvl7pPr marL="8778240" algn="l" defTabSz="2926080" rtl="0" eaLnBrk="1" latinLnBrk="0" hangingPunct="1">
+        <a:defRPr sz="5760" kern="1200">
           <a:solidFill>
             <a:schemeClr val="tx1"/>
           </a:solidFill>
@@ -3370,8 +3371,8 @@
           <a:cs typeface="+mn-cs"/>
         </a:defRPr>
       </a:lvl7pPr>
-      <a:lvl8pPr marL="15361920" algn="l" defTabSz="4389120" rtl="0" eaLnBrk="1" latinLnBrk="0" hangingPunct="1">
-        <a:defRPr sz="8640" kern="1200">
+      <a:lvl8pPr marL="10241280" algn="l" defTabSz="2926080" rtl="0" eaLnBrk="1" latinLnBrk="0" hangingPunct="1">
+        <a:defRPr sz="5760" kern="1200">
           <a:solidFill>
             <a:schemeClr val="tx1"/>
           </a:solidFill>
@@ -3380,8 +3381,8 @@
           <a:cs typeface="+mn-cs"/>
         </a:defRPr>
       </a:lvl8pPr>
-      <a:lvl9pPr marL="17556480" algn="l" defTabSz="4389120" rtl="0" eaLnBrk="1" latinLnBrk="0" hangingPunct="1">
-        <a:defRPr sz="8640" kern="1200">
+      <a:lvl9pPr marL="11704320" algn="l" defTabSz="2926080" rtl="0" eaLnBrk="1" latinLnBrk="0" hangingPunct="1">
+        <a:defRPr sz="5760" kern="1200">
           <a:solidFill>
             <a:schemeClr val="tx1"/>
           </a:solidFill>
@@ -3426,8 +3427,8 @@
         </p:nvSpPr>
         <p:spPr>
           <a:xfrm>
-            <a:off x="1" y="0"/>
-            <a:ext cx="18624884" cy="32918400"/>
+            <a:off x="2" y="0"/>
+            <a:ext cx="12416589" cy="21945600"/>
           </a:xfrm>
           <a:prstGeom prst="rect">
             <a:avLst/>
@@ -3460,7 +3461,7 @@
           <a:lstStyle/>
           <a:p>
             <a:pPr algn="ctr"/>
-            <a:endParaRPr lang="en-US" sz="1200" dirty="0"/>
+            <a:endParaRPr lang="en-US" sz="799" dirty="0"/>
           </a:p>
         </p:txBody>
       </p:sp>
@@ -3478,8 +3479,8 @@
         </p:nvSpPr>
         <p:spPr>
           <a:xfrm>
-            <a:off x="931094" y="2708200"/>
-            <a:ext cx="16937703" cy="7787260"/>
+            <a:off x="620730" y="1805469"/>
+            <a:ext cx="11291802" cy="5221686"/>
           </a:xfrm>
           <a:prstGeom prst="rect">
             <a:avLst/>
@@ -3493,7 +3494,7 @@
           <a:lstStyle/>
           <a:p>
             <a:r>
-              <a:rPr lang="en-US" sz="12501" dirty="0">
+              <a:rPr lang="en-US" sz="8333" dirty="0">
                 <a:solidFill>
                   <a:schemeClr val="bg1"/>
                 </a:solidFill>
@@ -3504,7 +3505,7 @@
               <a:t>Show people </a:t>
             </a:r>
             <a:r>
-              <a:rPr lang="en-US" sz="12501" dirty="0">
+              <a:rPr lang="en-US" sz="8333" dirty="0">
                 <a:solidFill>
                   <a:srgbClr val="FBE2A3"/>
                 </a:solidFill>
@@ -3515,7 +3516,7 @@
               <a:t>the big takeaways of your research in 5 seconds </a:t>
             </a:r>
             <a:r>
-              <a:rPr lang="en-US" sz="12501" dirty="0">
+              <a:rPr lang="en-US" sz="8333" dirty="0">
                 <a:solidFill>
                   <a:schemeClr val="bg1"/>
                 </a:solidFill>
@@ -3542,8 +3543,8 @@
         </p:nvSpPr>
         <p:spPr>
           <a:xfrm>
-            <a:off x="20802601" y="6320857"/>
-            <a:ext cx="26258396" cy="9949835"/>
+            <a:off x="13868402" y="4213907"/>
+            <a:ext cx="17505597" cy="6633223"/>
           </a:xfrm>
           <a:prstGeom prst="rect">
             <a:avLst/>
@@ -3584,7 +3585,7 @@
           <a:p>
             <a:pPr algn="ctr"/>
             <a:r>
-              <a:rPr lang="en-US" sz="1200" dirty="0"/>
+              <a:rPr lang="en-US" sz="799" dirty="0"/>
               <a:t>v</a:t>
             </a:r>
           </a:p>
@@ -3604,8 +3605,8 @@
         </p:nvSpPr>
         <p:spPr>
           <a:xfrm>
-            <a:off x="35467091" y="19664320"/>
-            <a:ext cx="11593907" cy="9625637"/>
+            <a:off x="23644728" y="13109549"/>
+            <a:ext cx="7729272" cy="6417091"/>
           </a:xfrm>
           <a:prstGeom prst="rect">
             <a:avLst/>
@@ -3646,7 +3647,7 @@
           <a:p>
             <a:pPr algn="ctr"/>
             <a:r>
-              <a:rPr lang="en-US" sz="1200" dirty="0"/>
+              <a:rPr lang="en-US" sz="799" dirty="0"/>
               <a:t>v</a:t>
             </a:r>
           </a:p>
@@ -3666,8 +3667,8 @@
         </p:nvSpPr>
         <p:spPr>
           <a:xfrm>
-            <a:off x="20802600" y="19664321"/>
-            <a:ext cx="12153900" cy="9625635"/>
+            <a:off x="13868401" y="13109548"/>
+            <a:ext cx="8102599" cy="6417090"/>
           </a:xfrm>
           <a:prstGeom prst="rect">
             <a:avLst/>
@@ -3708,7 +3709,7 @@
           <a:p>
             <a:pPr algn="ctr"/>
             <a:r>
-              <a:rPr lang="en-US" sz="1200" dirty="0"/>
+              <a:rPr lang="en-US" sz="799" dirty="0"/>
               <a:t>v</a:t>
             </a:r>
           </a:p>
@@ -3729,10 +3730,10 @@
           <p:nvPr/>
         </p:nvPicPr>
         <p:blipFill>
-          <a:blip r:embed="rId2">
+          <a:blip>
             <a:extLst>
               <a:ext uri="{96DAC541-7B7A-43D3-8B79-37D633B846F1}">
-                <asvg:svgBlip xmlns:asvg="http://schemas.microsoft.com/office/drawing/2016/SVG/main" r:embed="rId3"/>
+                <asvg:svgBlip xmlns:asvg="http://schemas.microsoft.com/office/drawing/2016/SVG/main" r:embed="rId2"/>
               </a:ext>
             </a:extLst>
           </a:blip>
@@ -3742,8 +3743,8 @@
         </p:blipFill>
         <p:spPr>
           <a:xfrm>
-            <a:off x="21912427" y="21807111"/>
-            <a:ext cx="9932246" cy="5650080"/>
+            <a:off x="14608284" y="14538074"/>
+            <a:ext cx="6621498" cy="3766721"/>
           </a:xfrm>
           <a:prstGeom prst="rect">
             <a:avLst/>
@@ -3765,10 +3766,10 @@
           <p:nvPr/>
         </p:nvPicPr>
         <p:blipFill>
-          <a:blip r:embed="rId4">
+          <a:blip>
             <a:extLst>
               <a:ext uri="{96DAC541-7B7A-43D3-8B79-37D633B846F1}">
-                <asvg:svgBlip xmlns:asvg="http://schemas.microsoft.com/office/drawing/2016/SVG/main" r:embed="rId5"/>
+                <asvg:svgBlip xmlns:asvg="http://schemas.microsoft.com/office/drawing/2016/SVG/main" r:embed="rId3"/>
               </a:ext>
             </a:extLst>
           </a:blip>
@@ -3778,8 +3779,8 @@
         </p:blipFill>
         <p:spPr>
           <a:xfrm>
-            <a:off x="36239117" y="21233981"/>
-            <a:ext cx="10106526" cy="6304799"/>
+            <a:off x="24159413" y="14155989"/>
+            <a:ext cx="6737683" cy="4203199"/>
           </a:xfrm>
           <a:prstGeom prst="rect">
             <a:avLst/>
@@ -3800,8 +3801,8 @@
         </p:nvSpPr>
         <p:spPr>
           <a:xfrm>
-            <a:off x="21912427" y="6989273"/>
-            <a:ext cx="14788265" cy="4524315"/>
+            <a:off x="14608286" y="4659517"/>
+            <a:ext cx="9858843" cy="3046219"/>
           </a:xfrm>
           <a:prstGeom prst="rect">
             <a:avLst/>
@@ -3815,7 +3816,7 @@
           <a:lstStyle/>
           <a:p>
             <a:r>
-              <a:rPr lang="en-US" sz="4800" dirty="0">
+              <a:rPr lang="en-US" sz="3199" dirty="0">
                 <a:latin typeface="Segoe UI" panose="020B0502040204020203" pitchFamily="34" charset="0"/>
                 <a:ea typeface="Segoe UI Black" panose="020B0A02040204020203" pitchFamily="34" charset="0"/>
                 <a:cs typeface="Segoe UI" panose="020B0502040204020203" pitchFamily="34" charset="0"/>
@@ -3824,12 +3825,12 @@
             </a:r>
           </a:p>
           <a:p>
-            <a:pPr marL="685800" indent="-685800">
+            <a:pPr marL="457178" indent="-457178">
               <a:buFont typeface="Arial" panose="020B0604020202020204" pitchFamily="34" charset="0"/>
               <a:buChar char="•"/>
             </a:pPr>
             <a:r>
-              <a:rPr lang="en-US" sz="4800" dirty="0">
+              <a:rPr lang="en-US" sz="3199" dirty="0">
                 <a:latin typeface="Segoe UI" panose="020B0502040204020203" pitchFamily="34" charset="0"/>
                 <a:ea typeface="Segoe UI Black" panose="020B0A02040204020203" pitchFamily="34" charset="0"/>
                 <a:cs typeface="Segoe UI" panose="020B0502040204020203" pitchFamily="34" charset="0"/>
@@ -3838,12 +3839,12 @@
             </a:r>
           </a:p>
           <a:p>
-            <a:pPr marL="685800" indent="-685800">
+            <a:pPr marL="457178" indent="-457178">
               <a:buFont typeface="Arial" panose="020B0604020202020204" pitchFamily="34" charset="0"/>
               <a:buChar char="•"/>
             </a:pPr>
             <a:r>
-              <a:rPr lang="en-US" sz="4800" dirty="0">
+              <a:rPr lang="en-US" sz="3199" dirty="0">
                 <a:latin typeface="Segoe UI" panose="020B0502040204020203" pitchFamily="34" charset="0"/>
                 <a:ea typeface="Segoe UI Black" panose="020B0A02040204020203" pitchFamily="34" charset="0"/>
                 <a:cs typeface="Segoe UI" panose="020B0502040204020203" pitchFamily="34" charset="0"/>
@@ -3852,12 +3853,12 @@
             </a:r>
           </a:p>
           <a:p>
-            <a:pPr marL="685800" indent="-685800">
+            <a:pPr marL="457178" indent="-457178">
               <a:buFont typeface="Arial" panose="020B0604020202020204" pitchFamily="34" charset="0"/>
               <a:buChar char="•"/>
             </a:pPr>
             <a:r>
-              <a:rPr lang="en-US" sz="4800" dirty="0">
+              <a:rPr lang="en-US" sz="3199" dirty="0">
                 <a:latin typeface="Segoe UI" panose="020B0502040204020203" pitchFamily="34" charset="0"/>
                 <a:ea typeface="Segoe UI Black" panose="020B0A02040204020203" pitchFamily="34" charset="0"/>
                 <a:cs typeface="Segoe UI" panose="020B0502040204020203" pitchFamily="34" charset="0"/>
@@ -3866,11 +3867,11 @@
             </a:r>
           </a:p>
           <a:p>
-            <a:pPr marL="685800" indent="-685800">
+            <a:pPr marL="457178" indent="-457178">
               <a:buFont typeface="Arial" panose="020B0604020202020204" pitchFamily="34" charset="0"/>
               <a:buChar char="•"/>
             </a:pPr>
-            <a:endParaRPr lang="en-US" sz="4800" dirty="0">
+            <a:endParaRPr lang="en-US" sz="3199" dirty="0">
               <a:latin typeface="Segoe UI" panose="020B0502040204020203" pitchFamily="34" charset="0"/>
               <a:ea typeface="Segoe UI Black" panose="020B0A02040204020203" pitchFamily="34" charset="0"/>
               <a:cs typeface="Segoe UI" panose="020B0502040204020203" pitchFamily="34" charset="0"/>
@@ -3878,7 +3879,7 @@
           </a:p>
           <a:p>
             <a:r>
-              <a:rPr lang="en-US" sz="4800" dirty="0">
+              <a:rPr lang="en-US" sz="3199" dirty="0">
                 <a:latin typeface="Segoe UI" panose="020B0502040204020203" pitchFamily="34" charset="0"/>
                 <a:ea typeface="Segoe UI Black" panose="020B0A02040204020203" pitchFamily="34" charset="0"/>
                 <a:cs typeface="Segoe UI" panose="020B0502040204020203" pitchFamily="34" charset="0"/>
@@ -3886,7 +3887,7 @@
               <a:t>Use </a:t>
             </a:r>
             <a:r>
-              <a:rPr lang="en-US" sz="4800" dirty="0">
+              <a:rPr lang="en-US" sz="3199" dirty="0">
                 <a:solidFill>
                   <a:srgbClr val="ED1C24"/>
                 </a:solidFill>
@@ -3897,7 +3898,7 @@
               <a:t>color</a:t>
             </a:r>
             <a:r>
-              <a:rPr lang="en-US" sz="4800" dirty="0">
+              <a:rPr lang="en-US" sz="3199" dirty="0">
                 <a:latin typeface="Segoe UI" panose="020B0502040204020203" pitchFamily="34" charset="0"/>
                 <a:ea typeface="Segoe UI Black" panose="020B0A02040204020203" pitchFamily="34" charset="0"/>
                 <a:cs typeface="Segoe UI" panose="020B0502040204020203" pitchFamily="34" charset="0"/>
@@ -3905,7 +3906,7 @@
               <a:t> and/or </a:t>
             </a:r>
             <a:r>
-              <a:rPr lang="en-US" sz="4800" dirty="0">
+              <a:rPr lang="en-US" sz="3199" dirty="0">
                 <a:latin typeface="Segoe UI Black" panose="020B0A02040204020203" pitchFamily="34" charset="0"/>
                 <a:ea typeface="Segoe UI Black" panose="020B0A02040204020203" pitchFamily="34" charset="0"/>
                 <a:cs typeface="Segoe UI" panose="020B0502040204020203" pitchFamily="34" charset="0"/>
@@ -3913,7 +3914,7 @@
               <a:t>weight</a:t>
             </a:r>
             <a:r>
-              <a:rPr lang="en-US" sz="4800" dirty="0">
+              <a:rPr lang="en-US" sz="3199" dirty="0">
                 <a:latin typeface="Segoe UI" panose="020B0502040204020203" pitchFamily="34" charset="0"/>
                 <a:ea typeface="Segoe UI Black" panose="020B0A02040204020203" pitchFamily="34" charset="0"/>
                 <a:cs typeface="Segoe UI" panose="020B0502040204020203" pitchFamily="34" charset="0"/>
@@ -3937,8 +3938,8 @@
         </p:nvSpPr>
         <p:spPr>
           <a:xfrm>
-            <a:off x="21912425" y="4906724"/>
-            <a:ext cx="7640052" cy="1323567"/>
+            <a:off x="14608284" y="3271151"/>
+            <a:ext cx="5093369" cy="913199"/>
           </a:xfrm>
           <a:prstGeom prst="rect">
             <a:avLst/>
@@ -3952,7 +3953,7 @@
           <a:lstStyle/>
           <a:p>
             <a:r>
-              <a:rPr lang="en-US" sz="8001" dirty="0">
+              <a:rPr lang="en-US" sz="5334" dirty="0">
                 <a:latin typeface="Segoe UI Light" panose="020B0502040204020203" pitchFamily="34" charset="0"/>
                 <a:ea typeface="Segoe UI Black" panose="020B0A02040204020203" pitchFamily="34" charset="0"/>
                 <a:cs typeface="Segoe UI Light" panose="020B0502040204020203" pitchFamily="34" charset="0"/>
@@ -3976,8 +3977,8 @@
         </p:nvSpPr>
         <p:spPr>
           <a:xfrm>
-            <a:off x="21912425" y="17507885"/>
-            <a:ext cx="11236581" cy="1569660"/>
+            <a:off x="14608284" y="11671924"/>
+            <a:ext cx="7491054" cy="1076961"/>
           </a:xfrm>
           <a:prstGeom prst="rect">
             <a:avLst/>
@@ -3991,7 +3992,7 @@
           <a:lstStyle/>
           <a:p>
             <a:r>
-              <a:rPr lang="en-US" sz="4800" dirty="0">
+              <a:rPr lang="en-US" sz="3199" dirty="0">
                 <a:latin typeface="Segoe UI" panose="020B0502040204020203" pitchFamily="34" charset="0"/>
                 <a:ea typeface="Segoe UI Black" panose="020B0A02040204020203" pitchFamily="34" charset="0"/>
                 <a:cs typeface="Segoe UI" panose="020B0502040204020203" pitchFamily="34" charset="0"/>
@@ -4001,14 +4002,14 @@
           </a:p>
           <a:p>
             <a:r>
-              <a:rPr lang="en-US" sz="4800" dirty="0">
+              <a:rPr lang="en-US" sz="3199" dirty="0">
                 <a:latin typeface="Segoe UI" panose="020B0502040204020203" pitchFamily="34" charset="0"/>
                 <a:cs typeface="Segoe UI" panose="020B0502040204020203" pitchFamily="34" charset="0"/>
               </a:rPr>
               <a:t>Like, </a:t>
             </a:r>
             <a:r>
-              <a:rPr lang="en-US" sz="4800" dirty="0">
+              <a:rPr lang="en-US" sz="3199" dirty="0">
                 <a:latin typeface="Segoe UI Black" panose="020B0A02040204020203" pitchFamily="34" charset="0"/>
                 <a:ea typeface="Segoe UI Black" panose="020B0A02040204020203" pitchFamily="34" charset="0"/>
                 <a:cs typeface="Segoe UI" panose="020B0502040204020203" pitchFamily="34" charset="0"/>
@@ -4032,8 +4033,8 @@
         </p:nvSpPr>
         <p:spPr>
           <a:xfrm>
-            <a:off x="35573106" y="17507885"/>
-            <a:ext cx="11236581" cy="1569660"/>
+            <a:off x="23715406" y="11671924"/>
+            <a:ext cx="7491054" cy="1076961"/>
           </a:xfrm>
           <a:prstGeom prst="rect">
             <a:avLst/>
@@ -4047,7 +4048,7 @@
           <a:lstStyle/>
           <a:p>
             <a:r>
-              <a:rPr lang="en-US" sz="4800" dirty="0">
+              <a:rPr lang="en-US" sz="3199" dirty="0">
                 <a:latin typeface="Segoe UI" panose="020B0502040204020203" pitchFamily="34" charset="0"/>
                 <a:ea typeface="Segoe UI Black" panose="020B0A02040204020203" pitchFamily="34" charset="0"/>
                 <a:cs typeface="Segoe UI" panose="020B0502040204020203" pitchFamily="34" charset="0"/>
@@ -4055,14 +4056,14 @@
               <a:t>Even more things go here.</a:t>
             </a:r>
             <a:br>
-              <a:rPr lang="en-US" sz="4800" dirty="0">
+              <a:rPr lang="en-US" sz="3199" dirty="0">
                 <a:latin typeface="Segoe UI" panose="020B0502040204020203" pitchFamily="34" charset="0"/>
                 <a:ea typeface="Segoe UI Black" panose="020B0A02040204020203" pitchFamily="34" charset="0"/>
                 <a:cs typeface="Segoe UI" panose="020B0502040204020203" pitchFamily="34" charset="0"/>
               </a:rPr>
             </a:br>
             <a:r>
-              <a:rPr lang="en-US" sz="4800" dirty="0">
+              <a:rPr lang="en-US" sz="3199" dirty="0">
                 <a:latin typeface="Segoe UI Black" panose="020B0A02040204020203" pitchFamily="34" charset="0"/>
                 <a:ea typeface="Segoe UI Black" panose="020B0A02040204020203" pitchFamily="34" charset="0"/>
                 <a:cs typeface="Segoe UI" panose="020B0502040204020203" pitchFamily="34" charset="0"/>
@@ -4086,10 +4087,10 @@
         </p:nvGrpSpPr>
         <p:grpSpPr>
           <a:xfrm>
-            <a:off x="-613875" y="12501678"/>
-            <a:ext cx="18067950" cy="13807775"/>
+            <a:off x="-409250" y="8334452"/>
+            <a:ext cx="12045300" cy="7317207"/>
             <a:chOff x="-409250" y="8334452"/>
-            <a:chExt cx="12045300" cy="9205183"/>
+            <a:chExt cx="12045300" cy="9441466"/>
           </a:xfrm>
         </p:grpSpPr>
         <p:pic>
@@ -4107,7 +4108,7 @@
             <p:nvPr/>
           </p:nvPicPr>
           <p:blipFill>
-            <a:blip r:embed="rId6">
+            <a:blip r:embed="rId4">
               <a:extLst>
                 <a:ext uri="{28A0092B-C50C-407E-A947-70E740481C1C}">
                   <a14:useLocalDpi xmlns:a14="http://schemas.microsoft.com/office/drawing/2010/main" val="0"/>
@@ -4220,7 +4221,7 @@
             <a:lstStyle/>
             <a:p>
               <a:pPr algn="ctr"/>
-              <a:endParaRPr lang="en-US" sz="1200"/>
+              <a:endParaRPr lang="en-US" sz="799"/>
             </a:p>
           </p:txBody>
         </p:sp>
@@ -4239,7 +4240,7 @@
           <p:spPr>
             <a:xfrm>
               <a:off x="3187336" y="16862526"/>
-              <a:ext cx="6883400" cy="677109"/>
+              <a:ext cx="6883400" cy="913392"/>
             </a:xfrm>
             <a:prstGeom prst="rect">
               <a:avLst/>
@@ -4253,7 +4254,7 @@
             <a:lstStyle/>
             <a:p>
               <a:r>
-                <a:rPr lang="en-US" sz="6000" dirty="0">
+                <a:rPr lang="en-US" sz="4000" dirty="0">
                   <a:solidFill>
                     <a:srgbClr val="8DC63F"/>
                   </a:solidFill>
@@ -4279,7 +4280,7 @@
           <p:nvPr/>
         </p:nvPicPr>
         <p:blipFill>
-          <a:blip r:embed="rId7">
+          <a:blip r:embed="rId5">
             <a:extLst>
               <a:ext uri="{28A0092B-C50C-407E-A947-70E740481C1C}">
                 <a14:useLocalDpi xmlns:a14="http://schemas.microsoft.com/office/drawing/2010/main" val="0"/>
@@ -4293,8 +4294,8 @@
         </p:blipFill>
         <p:spPr bwMode="auto">
           <a:xfrm>
-            <a:off x="46223920" y="30299891"/>
-            <a:ext cx="2618510" cy="2618510"/>
+            <a:off x="30815948" y="20199927"/>
+            <a:ext cx="1745673" cy="1745673"/>
           </a:xfrm>
           <a:prstGeom prst="rect">
             <a:avLst/>
@@ -4325,8 +4326,8 @@
         </p:nvSpPr>
         <p:spPr>
           <a:xfrm>
-            <a:off x="19072505" y="851311"/>
-            <a:ext cx="29603670" cy="1323567"/>
+            <a:off x="12715004" y="552133"/>
+            <a:ext cx="19735781" cy="913199"/>
           </a:xfrm>
           <a:prstGeom prst="rect">
             <a:avLst/>
@@ -4341,7 +4342,7 @@
           <a:p>
             <a:pPr algn="ctr"/>
             <a:r>
-              <a:rPr lang="en-US" sz="8001" dirty="0">
+              <a:rPr lang="en-US" sz="5334" dirty="0">
                 <a:latin typeface="Segoe UI Black" panose="020B0A02040204020203" pitchFamily="34" charset="0"/>
                 <a:ea typeface="Segoe UI Black" panose="020B0A02040204020203" pitchFamily="34" charset="0"/>
                 <a:cs typeface="Segoe UI Light" panose="020B0502040204020203" pitchFamily="34" charset="0"/>
@@ -4365,8 +4366,8 @@
         </p:nvSpPr>
         <p:spPr>
           <a:xfrm>
-            <a:off x="19072505" y="2265444"/>
-            <a:ext cx="29603670" cy="1107996"/>
+            <a:off x="12715004" y="1510297"/>
+            <a:ext cx="19735781" cy="769441"/>
           </a:xfrm>
           <a:prstGeom prst="rect">
             <a:avLst/>
@@ -4381,12 +4382,12 @@
           <a:p>
             <a:pPr algn="ctr"/>
             <a:r>
-              <a:rPr lang="en-US" sz="6600" dirty="0">
+              <a:rPr lang="en-US" sz="4400" dirty="0">
                 <a:latin typeface="Segoe UI Light" panose="020B0502040204020203" pitchFamily="34" charset="0"/>
                 <a:ea typeface="Segoe UI Black" panose="020B0A02040204020203" pitchFamily="34" charset="0"/>
                 <a:cs typeface="Segoe UI Light" panose="020B0502040204020203" pitchFamily="34" charset="0"/>
               </a:rPr>
-              <a:t>Your names | GHP Mathematics 2025</a:t>
+              <a:t>Your names | GHP Mathematics 2026</a:t>
             </a:r>
           </a:p>
         </p:txBody>
@@ -4407,8 +4408,8 @@
             </p:nvSpPr>
             <p:spPr>
               <a:xfrm>
-                <a:off x="29126537" y="12145381"/>
-                <a:ext cx="9495613" cy="2718821"/>
+                <a:off x="19386543" y="8096921"/>
+                <a:ext cx="6392712" cy="1849032"/>
               </a:xfrm>
               <a:prstGeom prst="rect">
                 <a:avLst/>
@@ -4429,13 +4430,13 @@
                     </m:oMathParaPr>
                     <m:oMath xmlns:m="http://schemas.openxmlformats.org/officeDocument/2006/math">
                       <m:r>
-                        <a:rPr lang="en-US" sz="8000" b="0" i="1" smtClean="0">
+                        <a:rPr lang="en-US" sz="5333" i="1">
                           <a:latin typeface="Cambria Math" panose="02040503050406030204" pitchFamily="18" charset="0"/>
                         </a:rPr>
                         <m:t>𝑥</m:t>
                       </m:r>
                       <m:r>
-                        <a:rPr lang="en-US" sz="8000" b="0" i="1" smtClean="0">
+                        <a:rPr lang="en-US" sz="5333" i="1">
                           <a:latin typeface="Cambria Math" panose="02040503050406030204" pitchFamily="18" charset="0"/>
                         </a:rPr>
                         <m:t>=</m:t>
@@ -4443,26 +4444,26 @@
                       <m:f>
                         <m:fPr>
                           <m:ctrlPr>
-                            <a:rPr lang="en-US" sz="8000" b="0" i="1" smtClean="0">
+                            <a:rPr lang="en-US" sz="5333" i="1">
                               <a:latin typeface="Cambria Math" panose="02040503050406030204" pitchFamily="18" charset="0"/>
                             </a:rPr>
                           </m:ctrlPr>
                         </m:fPr>
                         <m:num>
                           <m:r>
-                            <a:rPr lang="en-US" sz="8000" b="0" i="1" smtClean="0">
+                            <a:rPr lang="en-US" sz="5333" i="1">
                               <a:latin typeface="Cambria Math" panose="02040503050406030204" pitchFamily="18" charset="0"/>
                             </a:rPr>
                             <m:t>−</m:t>
                           </m:r>
                           <m:r>
-                            <a:rPr lang="en-US" sz="8000" b="0" i="1" smtClean="0">
+                            <a:rPr lang="en-US" sz="5333" i="1">
                               <a:latin typeface="Cambria Math" panose="02040503050406030204" pitchFamily="18" charset="0"/>
                             </a:rPr>
                             <m:t>𝑏</m:t>
                           </m:r>
                           <m:r>
-                            <a:rPr lang="en-US" sz="8000" b="0" i="1" smtClean="0">
+                            <a:rPr lang="en-US" sz="5333" i="1">
                               <a:latin typeface="Cambria Math" panose="02040503050406030204" pitchFamily="18" charset="0"/>
                             </a:rPr>
                             <m:t>±</m:t>
@@ -4471,7 +4472,7 @@
                             <m:radPr>
                               <m:degHide m:val="on"/>
                               <m:ctrlPr>
-                                <a:rPr lang="en-US" sz="8000" b="0" i="1" smtClean="0">
+                                <a:rPr lang="en-US" sz="5333" i="1">
                                   <a:latin typeface="Cambria Math" panose="02040503050406030204" pitchFamily="18" charset="0"/>
                                 </a:rPr>
                               </m:ctrlPr>
@@ -4481,14 +4482,14 @@
                               <m:sSup>
                                 <m:sSupPr>
                                   <m:ctrlPr>
-                                    <a:rPr lang="en-US" sz="8000" b="0" i="1" smtClean="0">
+                                    <a:rPr lang="en-US" sz="5333" i="1">
                                       <a:latin typeface="Cambria Math" panose="02040503050406030204" pitchFamily="18" charset="0"/>
                                     </a:rPr>
                                   </m:ctrlPr>
                                 </m:sSupPr>
                                 <m:e>
                                   <m:r>
-                                    <a:rPr lang="en-US" sz="8000" b="0" i="1" smtClean="0">
+                                    <a:rPr lang="en-US" sz="5333" i="1">
                                       <a:latin typeface="Cambria Math" panose="02040503050406030204" pitchFamily="18" charset="0"/>
                                     </a:rPr>
                                     <m:t>𝑏</m:t>
@@ -4496,7 +4497,7 @@
                                 </m:e>
                                 <m:sup>
                                   <m:r>
-                                    <a:rPr lang="en-US" sz="8000" b="0" i="1" smtClean="0">
+                                    <a:rPr lang="en-US" sz="5333" i="1">
                                       <a:latin typeface="Cambria Math" panose="02040503050406030204" pitchFamily="18" charset="0"/>
                                     </a:rPr>
                                     <m:t>2</m:t>
@@ -4504,13 +4505,13 @@
                                 </m:sup>
                               </m:sSup>
                               <m:r>
-                                <a:rPr lang="en-US" sz="8000" b="0" i="1" smtClean="0">
+                                <a:rPr lang="en-US" sz="5333" i="1">
                                   <a:latin typeface="Cambria Math" panose="02040503050406030204" pitchFamily="18" charset="0"/>
                                 </a:rPr>
                                 <m:t>−4</m:t>
                               </m:r>
                               <m:r>
-                                <a:rPr lang="en-US" sz="8000" b="0" i="1" smtClean="0">
+                                <a:rPr lang="en-US" sz="5333" i="1">
                                   <a:latin typeface="Cambria Math" panose="02040503050406030204" pitchFamily="18" charset="0"/>
                                 </a:rPr>
                                 <m:t>𝑎𝑐</m:t>
@@ -4520,13 +4521,13 @@
                         </m:num>
                         <m:den>
                           <m:r>
-                            <a:rPr lang="en-US" sz="8000" b="0" i="1" smtClean="0">
+                            <a:rPr lang="en-US" sz="5333" i="1">
                               <a:latin typeface="Cambria Math" panose="02040503050406030204" pitchFamily="18" charset="0"/>
                             </a:rPr>
                             <m:t>2</m:t>
                           </m:r>
                           <m:r>
-                            <a:rPr lang="en-US" sz="8000" b="0" i="1" smtClean="0">
+                            <a:rPr lang="en-US" sz="5333" i="1">
                               <a:latin typeface="Cambria Math" panose="02040503050406030204" pitchFamily="18" charset="0"/>
                             </a:rPr>
                             <m:t>𝑎</m:t>
@@ -4536,7 +4537,7 @@
                     </m:oMath>
                   </m:oMathPara>
                 </a14:m>
-                <a:endParaRPr lang="en-US" sz="8000" dirty="0"/>
+                <a:endParaRPr lang="en-US" sz="5333" dirty="0"/>
               </a:p>
             </p:txBody>
           </p:sp>
@@ -4558,16 +4559,16 @@
             </p:nvSpPr>
             <p:spPr>
               <a:xfrm>
-                <a:off x="29126537" y="12145381"/>
-                <a:ext cx="9495613" cy="2718821"/>
+                <a:off x="19386543" y="8096921"/>
+                <a:ext cx="6392712" cy="1849032"/>
               </a:xfrm>
               <a:prstGeom prst="rect">
                 <a:avLst/>
               </a:prstGeom>
               <a:blipFill>
-                <a:blip r:embed="rId8"/>
+                <a:blip r:embed="rId6"/>
                 <a:stretch>
-                  <a:fillRect/>
+                  <a:fillRect l="-595" b="-9524"/>
                 </a:stretch>
               </a:blipFill>
             </p:spPr>
@@ -4600,9 +4601,9 @@
 </file>
 
 <file path=ppt/theme/theme1.xml><?xml version="1.0" encoding="utf-8"?>
-<a:theme xmlns:a="http://schemas.openxmlformats.org/drawingml/2006/main" name="Office Theme">
+<a:theme xmlns:a="http://schemas.openxmlformats.org/drawingml/2006/main" name="Office 2013 - 2022 Theme">
   <a:themeElements>
-    <a:clrScheme name="Office Theme">
+    <a:clrScheme name="Office 2013 - 2022 Theme">
       <a:dk1>
         <a:sysClr val="windowText" lastClr="000000"/>
       </a:dk1>
@@ -4640,7 +4641,7 @@
         <a:srgbClr val="954F72"/>
       </a:folHlink>
     </a:clrScheme>
-    <a:fontScheme name="Office Theme">
+    <a:fontScheme name="Office 2013 - 2022 Theme">
       <a:majorFont>
         <a:latin typeface="Calibri Light" panose="020F0302020204030204"/>
         <a:ea typeface=""/>
@@ -4712,7 +4713,7 @@
         <a:font script="Geor" typeface="Sylfaen"/>
       </a:minorFont>
     </a:fontScheme>
-    <a:fmtScheme name="Office Theme">
+    <a:fmtScheme name="Office 2013 - 2022 Theme">
       <a:fillStyleLst>
         <a:solidFill>
           <a:schemeClr val="phClr"/>
@@ -4854,7 +4855,7 @@
   <a:extraClrSchemeLst/>
   <a:extLst>
     <a:ext uri="{05A4C25C-085E-4340-85A3-A5531E510DB2}">
-      <thm15:themeFamily xmlns:thm15="http://schemas.microsoft.com/office/thememl/2012/main" name="Office Theme" id="{62F939B6-93AF-4DB8-9C6B-D6C7DFDC589F}" vid="{4A3C46E8-61CC-4603-A589-7422A47A8E4A}"/>
+      <thm15:themeFamily xmlns:thm15="http://schemas.microsoft.com/office/thememl/2012/main" name="Office 2013 - 2022 Theme" id="{62F939B6-93AF-4DB8-9C6B-D6C7DFDC589F}" vid="{4A3C46E8-61CC-4603-A589-7422A47A8E4A}"/>
     </a:ext>
   </a:extLst>
 </a:theme>
